--- a/exports/pptx/lessons/senior-module-01-what-is-iks/day-02-vedic-reading.pptx
+++ b/exports/pptx/lessons/senior-module-01-what-is-iks/day-02-vedic-reading.pptx
@@ -16,9 +16,12 @@
     <p:sldId id="264" r:id="rId10"/>
     <p:sldId id="265" r:id="rId11"/>
     <p:sldId id="266" r:id="rId12"/>
+    <p:sldId id="267" r:id="rId13"/>
+    <p:sldId id="268" r:id="rId14"/>
+    <p:sldId id="269" r:id="rId15"/>
   </p:sldIdLst>
   <p:notesMasterIdLst>
-    <p:notesMasterId r:id="rId13"/>
+    <p:notesMasterId r:id="rId16"/>
   </p:notesMasterIdLst>
   <p:sldSz cx="9144000" cy="5143500"/>
   <p:notesSz cx="5143500" cy="9144000"/>
@@ -712,6 +715,270 @@
             <a:fld id="{F7021451-1387-4CA6-816F-3879F97B5CBC}" type="slidenum">
               <a:rPr lang="en-US"/>
               <a:t>11</a:t>
+            </a:fld>
+            <a:endParaRPr lang="en-US"/>
+          </a:p>
+        </p:txBody>
+      </p:sp>
+    </p:spTree>
+    <p:extLst>
+      <p:ext uri="{BB962C8B-B14F-4D97-AF65-F5344CB8AC3E}">
+        <p14:creationId xmlns:p14="http://schemas.microsoft.com/office/powerpoint/2010/main" val="1024086991"/>
+      </p:ext>
+    </p:extLst>
+  </p:cSld>
+  <p:clrMapOvr>
+    <a:masterClrMapping/>
+  </p:clrMapOvr>
+</p:notes>
+</file>
+
+<file path=ppt/notesSlides/notesSlide12.xml><?xml version="1.0" encoding="utf-8"?>
+<p:notes xmlns:a="http://schemas.openxmlformats.org/drawingml/2006/main" xmlns:r="http://schemas.openxmlformats.org/officeDocument/2006/relationships" xmlns:p="http://schemas.openxmlformats.org/presentationml/2006/main">
+  <p:cSld>
+    <p:spTree>
+      <p:nvGrpSpPr>
+        <p:cNvPr id="1" name=""/>
+        <p:cNvGrpSpPr/>
+        <p:nvPr/>
+      </p:nvGrpSpPr>
+      <p:grpSpPr>
+        <a:xfrm>
+          <a:off x="0" y="0"/>
+          <a:ext cx="0" cy="0"/>
+          <a:chOff x="0" y="0"/>
+          <a:chExt cx="0" cy="0"/>
+        </a:xfrm>
+      </p:grpSpPr>
+      <p:sp>
+        <p:nvSpPr>
+          <p:cNvPr id="2" name="Slide Image Placeholder 1"/>
+          <p:cNvSpPr>
+            <a:spLocks noGrp="1" noRot="1" noChangeAspect="1"/>
+          </p:cNvSpPr>
+          <p:nvPr>
+            <p:ph type="sldImg"/>
+          </p:nvPr>
+        </p:nvSpPr>
+        <p:spPr/>
+      </p:sp>
+      <p:sp>
+        <p:nvSpPr>
+          <p:cNvPr id="3" name="Notes Placeholder 2"/>
+          <p:cNvSpPr>
+            <a:spLocks noGrp="1"/>
+          </p:cNvSpPr>
+          <p:nvPr>
+            <p:ph type="body" idx="1"/>
+          </p:nvPr>
+        </p:nvSpPr>
+        <p:spPr/>
+        <p:txBody>
+          <a:bodyPr/>
+          <a:lstStyle/>
+          <a:p>
+            <a:r>
+              <a:rPr lang="en-US" dirty="0"/>
+              <a:t/>
+            </a:r>
+            <a:endParaRPr lang="en-US" dirty="0"/>
+          </a:p>
+        </p:txBody>
+      </p:sp>
+      <p:sp>
+        <p:nvSpPr>
+          <p:cNvPr id="4" name="Slide Number Placeholder 3"/>
+          <p:cNvSpPr>
+            <a:spLocks noGrp="1"/>
+          </p:cNvSpPr>
+          <p:nvPr>
+            <p:ph type="sldNum" sz="quarter" idx="10"/>
+          </p:nvPr>
+        </p:nvSpPr>
+        <p:spPr/>
+        <p:txBody>
+          <a:bodyPr/>
+          <a:lstStyle/>
+          <a:p>
+            <a:fld id="{F7021451-1387-4CA6-816F-3879F97B5CBC}" type="slidenum">
+              <a:rPr lang="en-US"/>
+              <a:t>12</a:t>
+            </a:fld>
+            <a:endParaRPr lang="en-US"/>
+          </a:p>
+        </p:txBody>
+      </p:sp>
+    </p:spTree>
+    <p:extLst>
+      <p:ext uri="{BB962C8B-B14F-4D97-AF65-F5344CB8AC3E}">
+        <p14:creationId xmlns:p14="http://schemas.microsoft.com/office/powerpoint/2010/main" val="1024086991"/>
+      </p:ext>
+    </p:extLst>
+  </p:cSld>
+  <p:clrMapOvr>
+    <a:masterClrMapping/>
+  </p:clrMapOvr>
+</p:notes>
+</file>
+
+<file path=ppt/notesSlides/notesSlide13.xml><?xml version="1.0" encoding="utf-8"?>
+<p:notes xmlns:a="http://schemas.openxmlformats.org/drawingml/2006/main" xmlns:r="http://schemas.openxmlformats.org/officeDocument/2006/relationships" xmlns:p="http://schemas.openxmlformats.org/presentationml/2006/main">
+  <p:cSld>
+    <p:spTree>
+      <p:nvGrpSpPr>
+        <p:cNvPr id="1" name=""/>
+        <p:cNvGrpSpPr/>
+        <p:nvPr/>
+      </p:nvGrpSpPr>
+      <p:grpSpPr>
+        <a:xfrm>
+          <a:off x="0" y="0"/>
+          <a:ext cx="0" cy="0"/>
+          <a:chOff x="0" y="0"/>
+          <a:chExt cx="0" cy="0"/>
+        </a:xfrm>
+      </p:grpSpPr>
+      <p:sp>
+        <p:nvSpPr>
+          <p:cNvPr id="2" name="Slide Image Placeholder 1"/>
+          <p:cNvSpPr>
+            <a:spLocks noGrp="1" noRot="1" noChangeAspect="1"/>
+          </p:cNvSpPr>
+          <p:nvPr>
+            <p:ph type="sldImg"/>
+          </p:nvPr>
+        </p:nvSpPr>
+        <p:spPr/>
+      </p:sp>
+      <p:sp>
+        <p:nvSpPr>
+          <p:cNvPr id="3" name="Notes Placeholder 2"/>
+          <p:cNvSpPr>
+            <a:spLocks noGrp="1"/>
+          </p:cNvSpPr>
+          <p:nvPr>
+            <p:ph type="body" idx="1"/>
+          </p:nvPr>
+        </p:nvSpPr>
+        <p:spPr/>
+        <p:txBody>
+          <a:bodyPr/>
+          <a:lstStyle/>
+          <a:p>
+            <a:r>
+              <a:rPr lang="en-US" dirty="0"/>
+              <a:t/>
+            </a:r>
+            <a:endParaRPr lang="en-US" dirty="0"/>
+          </a:p>
+        </p:txBody>
+      </p:sp>
+      <p:sp>
+        <p:nvSpPr>
+          <p:cNvPr id="4" name="Slide Number Placeholder 3"/>
+          <p:cNvSpPr>
+            <a:spLocks noGrp="1"/>
+          </p:cNvSpPr>
+          <p:nvPr>
+            <p:ph type="sldNum" sz="quarter" idx="10"/>
+          </p:nvPr>
+        </p:nvSpPr>
+        <p:spPr/>
+        <p:txBody>
+          <a:bodyPr/>
+          <a:lstStyle/>
+          <a:p>
+            <a:fld id="{F7021451-1387-4CA6-816F-3879F97B5CBC}" type="slidenum">
+              <a:rPr lang="en-US"/>
+              <a:t>13</a:t>
+            </a:fld>
+            <a:endParaRPr lang="en-US"/>
+          </a:p>
+        </p:txBody>
+      </p:sp>
+    </p:spTree>
+    <p:extLst>
+      <p:ext uri="{BB962C8B-B14F-4D97-AF65-F5344CB8AC3E}">
+        <p14:creationId xmlns:p14="http://schemas.microsoft.com/office/powerpoint/2010/main" val="1024086991"/>
+      </p:ext>
+    </p:extLst>
+  </p:cSld>
+  <p:clrMapOvr>
+    <a:masterClrMapping/>
+  </p:clrMapOvr>
+</p:notes>
+</file>
+
+<file path=ppt/notesSlides/notesSlide14.xml><?xml version="1.0" encoding="utf-8"?>
+<p:notes xmlns:a="http://schemas.openxmlformats.org/drawingml/2006/main" xmlns:r="http://schemas.openxmlformats.org/officeDocument/2006/relationships" xmlns:p="http://schemas.openxmlformats.org/presentationml/2006/main">
+  <p:cSld>
+    <p:spTree>
+      <p:nvGrpSpPr>
+        <p:cNvPr id="1" name=""/>
+        <p:cNvGrpSpPr/>
+        <p:nvPr/>
+      </p:nvGrpSpPr>
+      <p:grpSpPr>
+        <a:xfrm>
+          <a:off x="0" y="0"/>
+          <a:ext cx="0" cy="0"/>
+          <a:chOff x="0" y="0"/>
+          <a:chExt cx="0" cy="0"/>
+        </a:xfrm>
+      </p:grpSpPr>
+      <p:sp>
+        <p:nvSpPr>
+          <p:cNvPr id="2" name="Slide Image Placeholder 1"/>
+          <p:cNvSpPr>
+            <a:spLocks noGrp="1" noRot="1" noChangeAspect="1"/>
+          </p:cNvSpPr>
+          <p:nvPr>
+            <p:ph type="sldImg"/>
+          </p:nvPr>
+        </p:nvSpPr>
+        <p:spPr/>
+      </p:sp>
+      <p:sp>
+        <p:nvSpPr>
+          <p:cNvPr id="3" name="Notes Placeholder 2"/>
+          <p:cNvSpPr>
+            <a:spLocks noGrp="1"/>
+          </p:cNvSpPr>
+          <p:nvPr>
+            <p:ph type="body" idx="1"/>
+          </p:nvPr>
+        </p:nvSpPr>
+        <p:spPr/>
+        <p:txBody>
+          <a:bodyPr/>
+          <a:lstStyle/>
+          <a:p>
+            <a:r>
+              <a:rPr lang="en-US" dirty="0"/>
+              <a:t/>
+            </a:r>
+            <a:endParaRPr lang="en-US" dirty="0"/>
+          </a:p>
+        </p:txBody>
+      </p:sp>
+      <p:sp>
+        <p:nvSpPr>
+          <p:cNvPr id="4" name="Slide Number Placeholder 3"/>
+          <p:cNvSpPr>
+            <a:spLocks noGrp="1"/>
+          </p:cNvSpPr>
+          <p:nvPr>
+            <p:ph type="sldNum" sz="quarter" idx="10"/>
+          </p:nvPr>
+        </p:nvSpPr>
+        <p:spPr/>
+        <p:txBody>
+          <a:bodyPr/>
+          <a:lstStyle/>
+          <a:p>
+            <a:fld id="{F7021451-1387-4CA6-816F-3879F97B5CBC}" type="slidenum">
+              <a:rPr lang="en-US"/>
+              <a:t>14</a:t>
             </a:fld>
             <a:endParaRPr lang="en-US"/>
           </a:p>
@@ -1965,102 +2232,6 @@
         </p:nvSpPr>
         <p:spPr>
           <a:xfrm>
-            <a:off x="406301" y="1223963"/>
-            <a:ext cx="8498026" cy="274290"/>
-          </a:xfrm>
-          <a:prstGeom prst="rect">
-            <a:avLst/>
-          </a:prstGeom>
-          <a:noFill/>
-          <a:ln/>
-        </p:spPr>
-        <p:txBody>
-          <a:bodyPr wrap="square" lIns="0" tIns="0" rIns="0" bIns="0" rtlCol="0" anchor="t"/>
-          <a:lstStyle/>
-          <a:p>
-            <a:pPr algn="l" indent="0" marL="0">
-              <a:lnSpc>
-                <a:spcPts val="2160"/>
-              </a:lnSpc>
-              <a:spcBef>
-                <a:spcPts val="600"/>
-              </a:spcBef>
-              <a:spcAft>
-                <a:spcPts val="800"/>
-              </a:spcAft>
-              <a:buNone/>
-            </a:pPr>
-            <a:r>
-              <a:rPr lang="en-US" sz="1800" b="1" dirty="0">
-                <a:solidFill>
-                  <a:srgbClr val="997929"/>
-                </a:solidFill>
-                <a:latin typeface="Times New Roman" pitchFamily="34" charset="0"/>
-                <a:ea typeface="Times New Roman" pitchFamily="34" charset="-122"/>
-                <a:cs typeface="Times New Roman" pitchFamily="34" charset="-120"/>
-              </a:rPr>
-              <a:t>Learning objective</a:t>
-            </a:r>
-            <a:endParaRPr lang="en-US" sz="1800" dirty="0"/>
-          </a:p>
-        </p:txBody>
-      </p:sp>
-      <p:sp>
-        <p:nvSpPr>
-          <p:cNvPr id="6" name="Text 4"/>
-          <p:cNvSpPr/>
-          <p:nvPr/>
-        </p:nvSpPr>
-        <p:spPr>
-          <a:xfrm>
-            <a:off x="406301" y="1637854"/>
-            <a:ext cx="8498026" cy="426541"/>
-          </a:xfrm>
-          <a:prstGeom prst="rect">
-            <a:avLst/>
-          </a:prstGeom>
-          <a:noFill/>
-          <a:ln/>
-        </p:spPr>
-        <p:txBody>
-          <a:bodyPr wrap="square" lIns="0" tIns="0" rIns="0" bIns="0" rtlCol="0" anchor="t"/>
-          <a:lstStyle/>
-          <a:p>
-            <a:pPr algn="l" indent="0" marL="0">
-              <a:lnSpc>
-                <a:spcPts val="1680"/>
-              </a:lnSpc>
-              <a:spcBef>
-                <a:spcPts val="300"/>
-              </a:spcBef>
-              <a:spcAft>
-                <a:spcPts val="300"/>
-              </a:spcAft>
-              <a:buNone/>
-            </a:pPr>
-            <a:r>
-              <a:rPr lang="en-US" sz="1200" dirty="0">
-                <a:solidFill>
-                  <a:srgbClr val="1A1A1A"/>
-                </a:solidFill>
-                <a:latin typeface="Georgia" pitchFamily="34" charset="0"/>
-                <a:ea typeface="Georgia" pitchFamily="34" charset="-122"/>
-                <a:cs typeface="Georgia" pitchFamily="34" charset="-120"/>
-              </a:rPr>
-              <a:t>Students read Ṛg Veda 1.1 and Īśa Upaniṣad opening in IAST with word-by-word gloss, and articulate the difference in tone between the two textual layers.</a:t>
-            </a:r>
-            <a:endParaRPr lang="en-US" sz="1200" dirty="0"/>
-          </a:p>
-        </p:txBody>
-      </p:sp>
-      <p:sp>
-        <p:nvSpPr>
-          <p:cNvPr id="7" name="Text 5"/>
-          <p:cNvSpPr/>
-          <p:nvPr/>
-        </p:nvSpPr>
-        <p:spPr>
-          <a:xfrm>
             <a:off x="406301" y="4434929"/>
             <a:ext cx="8498026" cy="213271"/>
           </a:xfrm>
@@ -2205,7 +2376,7 @@
                 <a:ea typeface="Times New Roman" pitchFamily="34" charset="-122"/>
                 <a:cs typeface="Times New Roman" pitchFamily="34" charset="-120"/>
               </a:rPr>
-              <a:t>Teacher notes</a:t>
+              <a:t>Discussion (5 min)</a:t>
             </a:r>
             <a:endParaRPr lang="en-US" sz="1800" dirty="0"/>
           </a:p>
@@ -2219,8 +2390,8 @@
         </p:nvSpPr>
         <p:spPr>
           <a:xfrm>
-            <a:off x="406301" y="870942"/>
-            <a:ext cx="8498026" cy="426541"/>
+            <a:off x="634901" y="883593"/>
+            <a:ext cx="8102798" cy="731341"/>
           </a:xfrm>
           <a:prstGeom prst="rect">
             <a:avLst/>
@@ -2232,17 +2403,15 @@
           <a:bodyPr wrap="square" lIns="0" tIns="0" rIns="0" bIns="0" rtlCol="0" anchor="t"/>
           <a:lstStyle/>
           <a:p>
-            <a:pPr algn="l" indent="0" marL="0">
-              <a:lnSpc>
-                <a:spcPts val="1680"/>
-              </a:lnSpc>
-              <a:spcBef>
-                <a:spcPts val="300"/>
-              </a:spcBef>
-              <a:spcAft>
-                <a:spcPts val="300"/>
-              </a:spcAft>
-              <a:buNone/>
+            <a:pPr algn="l" marL="342900" indent="-342900">
+              <a:lnSpc>
+                <a:spcPts val="1620"/>
+              </a:lnSpc>
+              <a:spcAft>
+                <a:spcPts val="300"/>
+              </a:spcAft>
+              <a:buSzPct val="100000"/>
+              <a:buChar char="•"/>
             </a:pPr>
             <a:r>
               <a:rPr lang="en-US" sz="1200" dirty="0">
@@ -2253,7 +2422,31 @@
                 <a:ea typeface="Georgia" pitchFamily="34" charset="-122"/>
                 <a:cs typeface="Georgia" pitchFamily="34" charset="-120"/>
               </a:rPr>
-              <a:t>– Pronunciation perfection is NOT the goal. Engagement with meaning is. – Some students will notice that the Upanishadic voice sounds "more modern philosophical." That's a real observation worth honouring.</a:t>
+              <a:t>Compare: the tone of the Agni hymn versus the Īśa Upaniṣad. What changed?</a:t>
+            </a:r>
+            <a:endParaRPr lang="en-US" sz="1200" dirty="0"/>
+          </a:p>
+          <a:p>
+            <a:pPr algn="l" marL="342900" indent="-342900">
+              <a:lnSpc>
+                <a:spcPts val="1620"/>
+              </a:lnSpc>
+              <a:spcAft>
+                <a:spcPts val="300"/>
+              </a:spcAft>
+              <a:buSzPct val="100000"/>
+              <a:buChar char="•"/>
+            </a:pPr>
+            <a:r>
+              <a:rPr lang="en-US" sz="1200" dirty="0">
+                <a:solidFill>
+                  <a:srgbClr val="1A1A1A"/>
+                </a:solidFill>
+                <a:latin typeface="Georgia" pitchFamily="34" charset="0"/>
+                <a:ea typeface="Georgia" pitchFamily="34" charset="-122"/>
+                <a:cs typeface="Georgia" pitchFamily="34" charset="-120"/>
+              </a:rPr>
+              <a:t>The Vedic corpus contains BOTH — ritual and philosophy, hymn and abstract reflection. "Vedic" is a span, not a single voice.</a:t>
             </a:r>
             <a:endParaRPr lang="en-US" sz="1200" dirty="0"/>
           </a:p>
@@ -2411,7 +2604,7 @@
                 <a:ea typeface="Times New Roman" pitchFamily="34" charset="-122"/>
                 <a:cs typeface="Times New Roman" pitchFamily="34" charset="-120"/>
               </a:rPr>
-              <a:t>Citation(s) used</a:t>
+              <a:t>Wrap-up (5 min)</a:t>
             </a:r>
             <a:endParaRPr lang="en-US" sz="1800" dirty="0"/>
           </a:p>
@@ -2425,8 +2618,8 @@
         </p:nvSpPr>
         <p:spPr>
           <a:xfrm>
-            <a:off x="406301" y="870942"/>
-            <a:ext cx="8498026" cy="213271"/>
+            <a:off x="634901" y="883593"/>
+            <a:ext cx="8102798" cy="281880"/>
           </a:xfrm>
           <a:prstGeom prst="rect">
             <a:avLst/>
@@ -2438,17 +2631,15 @@
           <a:bodyPr wrap="square" lIns="0" tIns="0" rIns="0" bIns="0" rtlCol="0" anchor="t"/>
           <a:lstStyle/>
           <a:p>
-            <a:pPr algn="l" indent="0" marL="0">
-              <a:lnSpc>
-                <a:spcPts val="1680"/>
-              </a:lnSpc>
-              <a:spcBef>
-                <a:spcPts val="300"/>
-              </a:spcBef>
-              <a:spcAft>
-                <a:spcPts val="300"/>
-              </a:spcAft>
-              <a:buNone/>
+            <a:pPr algn="l" marL="342900" indent="-342900">
+              <a:lnSpc>
+                <a:spcPts val="1620"/>
+              </a:lnSpc>
+              <a:spcAft>
+                <a:spcPts val="300"/>
+              </a:spcAft>
+              <a:buSzPct val="100000"/>
+              <a:buChar char="•"/>
             </a:pPr>
             <a:r>
               <a:rPr lang="en-US" sz="1200" dirty="0">
@@ -2459,7 +2650,751 @@
                 <a:ea typeface="Georgia" pitchFamily="34" charset="-122"/>
                 <a:cs typeface="Georgia" pitchFamily="34" charset="-120"/>
               </a:rPr>
-              <a:t>– Jamison &amp; Brereton (2014) for Ṛg Veda 1.1. – Olivelle (1996) for Īśa Upaniṣad.</a:t>
+              <a:t>Preview Day 3: </a:t>
+            </a:r>
+            <a:pPr algn="l" indent="0" marL="0">
+              <a:lnSpc>
+                <a:spcPts val="1620"/>
+              </a:lnSpc>
+              <a:spcAft>
+                <a:spcPts val="300"/>
+              </a:spcAft>
+              <a:buNone/>
+            </a:pPr>
+            <a:r>
+              <a:rPr lang="en-US" sz="1200" i="1" dirty="0">
+                <a:solidFill>
+                  <a:srgbClr val="1A1A1A"/>
+                </a:solidFill>
+                <a:latin typeface="Georgia" pitchFamily="34" charset="0"/>
+                <a:ea typeface="Georgia" pitchFamily="34" charset="-122"/>
+                <a:cs typeface="Georgia" pitchFamily="34" charset="-120"/>
+              </a:rPr>
+              <a:t>"Tomorrow — the six darśanas, the philosophical schools."</a:t>
+            </a:r>
+            <a:endParaRPr lang="en-US" sz="1200" dirty="0"/>
+          </a:p>
+        </p:txBody>
+      </p:sp>
+      <p:sp>
+        <p:nvSpPr>
+          <p:cNvPr id="5" name="Text 3"/>
+          <p:cNvSpPr/>
+          <p:nvPr/>
+        </p:nvSpPr>
+        <p:spPr>
+          <a:xfrm>
+            <a:off x="406301" y="4434929"/>
+            <a:ext cx="8498026" cy="213271"/>
+          </a:xfrm>
+          <a:prstGeom prst="rect">
+            <a:avLst/>
+          </a:prstGeom>
+          <a:noFill/>
+          <a:ln/>
+        </p:spPr>
+        <p:txBody>
+          <a:bodyPr wrap="square" lIns="0" tIns="0" rIns="0" bIns="0" rtlCol="0" anchor="t"/>
+          <a:lstStyle/>
+          <a:p>
+            <a:pPr algn="l" indent="0" marL="0">
+              <a:lnSpc>
+                <a:spcPts val="1680"/>
+              </a:lnSpc>
+              <a:spcBef>
+                <a:spcPts val="300"/>
+              </a:spcBef>
+              <a:spcAft>
+                <a:spcPts val="300"/>
+              </a:spcAft>
+              <a:buNone/>
+            </a:pPr>
+            <a:r>
+              <a:rPr lang="en-US" sz="1200" dirty="0">
+                <a:solidFill>
+                  <a:srgbClr val="1A1A1A"/>
+                </a:solidFill>
+                <a:latin typeface="Georgia" pitchFamily="34" charset="0"/>
+                <a:ea typeface="Georgia" pitchFamily="34" charset="-122"/>
+                <a:cs typeface="Georgia" pitchFamily="34" charset="-120"/>
+              </a:rPr>
+              <a:t>Senior ·  · IKS Curriculum</a:t>
+            </a:r>
+            <a:endParaRPr lang="en-US" sz="1200" dirty="0"/>
+          </a:p>
+        </p:txBody>
+      </p:sp>
+    </p:spTree>
+  </p:cSld>
+  <p:clrMapOvr>
+    <a:masterClrMapping/>
+  </p:clrMapOvr>
+</p:sld>
+</file>
+
+<file path=ppt/slides/slide12.xml><?xml version="1.0" encoding="utf-8"?>
+<p:sld xmlns:a="http://schemas.openxmlformats.org/drawingml/2006/main" xmlns:r="http://schemas.openxmlformats.org/officeDocument/2006/relationships" xmlns:p="http://schemas.openxmlformats.org/presentationml/2006/main">
+  <p:cSld name="Slide 12">
+    <p:bg>
+      <p:bgPr>
+        <a:solidFill>
+          <a:srgbClr val="FAF7F2"/>
+        </a:solidFill>
+      </p:bgPr>
+    </p:bg>
+    <p:spTree>
+      <p:nvGrpSpPr>
+        <p:cNvPr id="1" name=""/>
+        <p:cNvGrpSpPr/>
+        <p:nvPr/>
+      </p:nvGrpSpPr>
+      <p:grpSpPr>
+        <a:xfrm>
+          <a:off x="0" y="0"/>
+          <a:ext cx="0" cy="0"/>
+          <a:chOff x="0" y="0"/>
+          <a:chExt cx="0" cy="0"/>
+        </a:xfrm>
+      </p:grpSpPr>
+      <p:sp>
+        <p:nvSpPr>
+          <p:cNvPr id="2" name="Text 0"/>
+          <p:cNvSpPr/>
+          <p:nvPr/>
+        </p:nvSpPr>
+        <p:spPr>
+          <a:xfrm>
+            <a:off x="0" y="0"/>
+            <a:ext cx="9144000" cy="101501"/>
+          </a:xfrm>
+          <a:prstGeom prst="rect">
+            <a:avLst/>
+          </a:prstGeom>
+          <a:solidFill>
+            <a:srgbClr val="5D1D2E"/>
+          </a:solidFill>
+          <a:ln/>
+        </p:spPr>
+        <p:txBody>
+          <a:bodyPr wrap="square" rtlCol="0" anchor="ctr"/>
+          <a:lstStyle/>
+          <a:p>
+            <a:pPr indent="0" marL="0">
+              <a:buNone/>
+            </a:pPr>
+            <a:endParaRPr lang="en-US" dirty="0"/>
+          </a:p>
+        </p:txBody>
+      </p:sp>
+      <p:sp>
+        <p:nvSpPr>
+          <p:cNvPr id="3" name="Text 1"/>
+          <p:cNvSpPr/>
+          <p:nvPr/>
+        </p:nvSpPr>
+        <p:spPr>
+          <a:xfrm>
+            <a:off x="406301" y="457051"/>
+            <a:ext cx="8498026" cy="274290"/>
+          </a:xfrm>
+          <a:prstGeom prst="rect">
+            <a:avLst/>
+          </a:prstGeom>
+          <a:noFill/>
+          <a:ln/>
+        </p:spPr>
+        <p:txBody>
+          <a:bodyPr wrap="square" lIns="0" tIns="0" rIns="0" bIns="0" rtlCol="0" anchor="t"/>
+          <a:lstStyle/>
+          <a:p>
+            <a:pPr algn="l" indent="0" marL="0">
+              <a:lnSpc>
+                <a:spcPts val="2160"/>
+              </a:lnSpc>
+              <a:spcBef>
+                <a:spcPts val="600"/>
+              </a:spcBef>
+              <a:spcAft>
+                <a:spcPts val="800"/>
+              </a:spcAft>
+              <a:buNone/>
+            </a:pPr>
+            <a:r>
+              <a:rPr lang="en-US" sz="1800" b="1" dirty="0">
+                <a:solidFill>
+                  <a:srgbClr val="997929"/>
+                </a:solidFill>
+                <a:latin typeface="Times New Roman" pitchFamily="34" charset="0"/>
+                <a:ea typeface="Times New Roman" pitchFamily="34" charset="-122"/>
+                <a:cs typeface="Times New Roman" pitchFamily="34" charset="-120"/>
+              </a:rPr>
+              <a:t>Differentiation</a:t>
+            </a:r>
+            <a:endParaRPr lang="en-US" sz="1800" dirty="0"/>
+          </a:p>
+        </p:txBody>
+      </p:sp>
+      <p:sp>
+        <p:nvSpPr>
+          <p:cNvPr id="4" name="Text 2"/>
+          <p:cNvSpPr/>
+          <p:nvPr/>
+        </p:nvSpPr>
+        <p:spPr>
+          <a:xfrm>
+            <a:off x="634901" y="883593"/>
+            <a:ext cx="8102798" cy="525661"/>
+          </a:xfrm>
+          <a:prstGeom prst="rect">
+            <a:avLst/>
+          </a:prstGeom>
+          <a:noFill/>
+          <a:ln/>
+        </p:spPr>
+        <p:txBody>
+          <a:bodyPr wrap="square" lIns="0" tIns="0" rIns="0" bIns="0" rtlCol="0" anchor="t"/>
+          <a:lstStyle/>
+          <a:p>
+            <a:pPr algn="l" marL="342900" indent="-342900">
+              <a:lnSpc>
+                <a:spcPts val="1620"/>
+              </a:lnSpc>
+              <a:spcAft>
+                <a:spcPts val="300"/>
+              </a:spcAft>
+              <a:buSzPct val="100000"/>
+              <a:buChar char="•"/>
+            </a:pPr>
+            <a:r>
+              <a:rPr lang="en-US" sz="1200" b="1" dirty="0">
+                <a:solidFill>
+                  <a:srgbClr val="1A1A1A"/>
+                </a:solidFill>
+                <a:latin typeface="Georgia" pitchFamily="34" charset="0"/>
+                <a:ea typeface="Georgia" pitchFamily="34" charset="-122"/>
+                <a:cs typeface="Georgia" pitchFamily="34" charset="-120"/>
+              </a:rPr>
+              <a:t>Tier up:</a:t>
+            </a:r>
+            <a:pPr algn="l" indent="0" marL="0">
+              <a:lnSpc>
+                <a:spcPts val="1620"/>
+              </a:lnSpc>
+              <a:spcAft>
+                <a:spcPts val="300"/>
+              </a:spcAft>
+              <a:buNone/>
+            </a:pPr>
+            <a:r>
+              <a:rPr lang="en-US" sz="1200" dirty="0">
+                <a:solidFill>
+                  <a:srgbClr val="1A1A1A"/>
+                </a:solidFill>
+                <a:latin typeface="Georgia" pitchFamily="34" charset="0"/>
+                <a:ea typeface="Georgia" pitchFamily="34" charset="-122"/>
+                <a:cs typeface="Georgia" pitchFamily="34" charset="-120"/>
+              </a:rPr>
+              <a:t> Read 5 more verses of Īśa Upaniṣad. Identify one verse that surprised you.</a:t>
+            </a:r>
+            <a:endParaRPr lang="en-US" sz="1200" dirty="0"/>
+          </a:p>
+          <a:p>
+            <a:pPr algn="l" marL="342900" indent="-342900">
+              <a:lnSpc>
+                <a:spcPts val="1620"/>
+              </a:lnSpc>
+              <a:spcAft>
+                <a:spcPts val="300"/>
+              </a:spcAft>
+              <a:buSzPct val="100000"/>
+              <a:buChar char="•"/>
+            </a:pPr>
+            <a:r>
+              <a:rPr lang="en-US" sz="1200" b="1" dirty="0">
+                <a:solidFill>
+                  <a:srgbClr val="1A1A1A"/>
+                </a:solidFill>
+                <a:latin typeface="Georgia" pitchFamily="34" charset="0"/>
+                <a:ea typeface="Georgia" pitchFamily="34" charset="-122"/>
+                <a:cs typeface="Georgia" pitchFamily="34" charset="-120"/>
+              </a:rPr>
+              <a:t>Tier down:</a:t>
+            </a:r>
+            <a:pPr algn="l" indent="0" marL="0">
+              <a:lnSpc>
+                <a:spcPts val="1620"/>
+              </a:lnSpc>
+              <a:spcAft>
+                <a:spcPts val="300"/>
+              </a:spcAft>
+              <a:buNone/>
+            </a:pPr>
+            <a:r>
+              <a:rPr lang="en-US" sz="1200" dirty="0">
+                <a:solidFill>
+                  <a:srgbClr val="1A1A1A"/>
+                </a:solidFill>
+                <a:latin typeface="Georgia" pitchFamily="34" charset="0"/>
+                <a:ea typeface="Georgia" pitchFamily="34" charset="-122"/>
+                <a:cs typeface="Georgia" pitchFamily="34" charset="-120"/>
+              </a:rPr>
+              <a:t> Focus on the contrast between the two readings, not detailed Sanskrit.</a:t>
+            </a:r>
+            <a:endParaRPr lang="en-US" sz="1200" dirty="0"/>
+          </a:p>
+        </p:txBody>
+      </p:sp>
+      <p:sp>
+        <p:nvSpPr>
+          <p:cNvPr id="5" name="Text 3"/>
+          <p:cNvSpPr/>
+          <p:nvPr/>
+        </p:nvSpPr>
+        <p:spPr>
+          <a:xfrm>
+            <a:off x="406301" y="4434929"/>
+            <a:ext cx="8498026" cy="213271"/>
+          </a:xfrm>
+          <a:prstGeom prst="rect">
+            <a:avLst/>
+          </a:prstGeom>
+          <a:noFill/>
+          <a:ln/>
+        </p:spPr>
+        <p:txBody>
+          <a:bodyPr wrap="square" lIns="0" tIns="0" rIns="0" bIns="0" rtlCol="0" anchor="t"/>
+          <a:lstStyle/>
+          <a:p>
+            <a:pPr algn="l" indent="0" marL="0">
+              <a:lnSpc>
+                <a:spcPts val="1680"/>
+              </a:lnSpc>
+              <a:spcBef>
+                <a:spcPts val="300"/>
+              </a:spcBef>
+              <a:spcAft>
+                <a:spcPts val="300"/>
+              </a:spcAft>
+              <a:buNone/>
+            </a:pPr>
+            <a:r>
+              <a:rPr lang="en-US" sz="1200" dirty="0">
+                <a:solidFill>
+                  <a:srgbClr val="1A1A1A"/>
+                </a:solidFill>
+                <a:latin typeface="Georgia" pitchFamily="34" charset="0"/>
+                <a:ea typeface="Georgia" pitchFamily="34" charset="-122"/>
+                <a:cs typeface="Georgia" pitchFamily="34" charset="-120"/>
+              </a:rPr>
+              <a:t>Senior ·  · IKS Curriculum</a:t>
+            </a:r>
+            <a:endParaRPr lang="en-US" sz="1200" dirty="0"/>
+          </a:p>
+        </p:txBody>
+      </p:sp>
+    </p:spTree>
+  </p:cSld>
+  <p:clrMapOvr>
+    <a:masterClrMapping/>
+  </p:clrMapOvr>
+</p:sld>
+</file>
+
+<file path=ppt/slides/slide13.xml><?xml version="1.0" encoding="utf-8"?>
+<p:sld xmlns:a="http://schemas.openxmlformats.org/drawingml/2006/main" xmlns:r="http://schemas.openxmlformats.org/officeDocument/2006/relationships" xmlns:p="http://schemas.openxmlformats.org/presentationml/2006/main">
+  <p:cSld name="Slide 13">
+    <p:bg>
+      <p:bgPr>
+        <a:solidFill>
+          <a:srgbClr val="FAF7F2"/>
+        </a:solidFill>
+      </p:bgPr>
+    </p:bg>
+    <p:spTree>
+      <p:nvGrpSpPr>
+        <p:cNvPr id="1" name=""/>
+        <p:cNvGrpSpPr/>
+        <p:nvPr/>
+      </p:nvGrpSpPr>
+      <p:grpSpPr>
+        <a:xfrm>
+          <a:off x="0" y="0"/>
+          <a:ext cx="0" cy="0"/>
+          <a:chOff x="0" y="0"/>
+          <a:chExt cx="0" cy="0"/>
+        </a:xfrm>
+      </p:grpSpPr>
+      <p:sp>
+        <p:nvSpPr>
+          <p:cNvPr id="2" name="Text 0"/>
+          <p:cNvSpPr/>
+          <p:nvPr/>
+        </p:nvSpPr>
+        <p:spPr>
+          <a:xfrm>
+            <a:off x="0" y="0"/>
+            <a:ext cx="9144000" cy="101501"/>
+          </a:xfrm>
+          <a:prstGeom prst="rect">
+            <a:avLst/>
+          </a:prstGeom>
+          <a:solidFill>
+            <a:srgbClr val="5D1D2E"/>
+          </a:solidFill>
+          <a:ln/>
+        </p:spPr>
+        <p:txBody>
+          <a:bodyPr wrap="square" rtlCol="0" anchor="ctr"/>
+          <a:lstStyle/>
+          <a:p>
+            <a:pPr indent="0" marL="0">
+              <a:buNone/>
+            </a:pPr>
+            <a:endParaRPr lang="en-US" dirty="0"/>
+          </a:p>
+        </p:txBody>
+      </p:sp>
+      <p:sp>
+        <p:nvSpPr>
+          <p:cNvPr id="3" name="Text 1"/>
+          <p:cNvSpPr/>
+          <p:nvPr/>
+        </p:nvSpPr>
+        <p:spPr>
+          <a:xfrm>
+            <a:off x="406301" y="457051"/>
+            <a:ext cx="8498026" cy="274290"/>
+          </a:xfrm>
+          <a:prstGeom prst="rect">
+            <a:avLst/>
+          </a:prstGeom>
+          <a:noFill/>
+          <a:ln/>
+        </p:spPr>
+        <p:txBody>
+          <a:bodyPr wrap="square" lIns="0" tIns="0" rIns="0" bIns="0" rtlCol="0" anchor="t"/>
+          <a:lstStyle/>
+          <a:p>
+            <a:pPr algn="l" indent="0" marL="0">
+              <a:lnSpc>
+                <a:spcPts val="2160"/>
+              </a:lnSpc>
+              <a:spcBef>
+                <a:spcPts val="600"/>
+              </a:spcBef>
+              <a:spcAft>
+                <a:spcPts val="800"/>
+              </a:spcAft>
+              <a:buNone/>
+            </a:pPr>
+            <a:r>
+              <a:rPr lang="en-US" sz="1800" b="1" dirty="0">
+                <a:solidFill>
+                  <a:srgbClr val="997929"/>
+                </a:solidFill>
+                <a:latin typeface="Times New Roman" pitchFamily="34" charset="0"/>
+                <a:ea typeface="Times New Roman" pitchFamily="34" charset="-122"/>
+                <a:cs typeface="Times New Roman" pitchFamily="34" charset="-120"/>
+              </a:rPr>
+              <a:t>Teacher notes</a:t>
+            </a:r>
+            <a:endParaRPr lang="en-US" sz="1800" dirty="0"/>
+          </a:p>
+        </p:txBody>
+      </p:sp>
+      <p:sp>
+        <p:nvSpPr>
+          <p:cNvPr id="4" name="Text 2"/>
+          <p:cNvSpPr/>
+          <p:nvPr/>
+        </p:nvSpPr>
+        <p:spPr>
+          <a:xfrm>
+            <a:off x="634901" y="883593"/>
+            <a:ext cx="8102798" cy="731341"/>
+          </a:xfrm>
+          <a:prstGeom prst="rect">
+            <a:avLst/>
+          </a:prstGeom>
+          <a:noFill/>
+          <a:ln/>
+        </p:spPr>
+        <p:txBody>
+          <a:bodyPr wrap="square" lIns="0" tIns="0" rIns="0" bIns="0" rtlCol="0" anchor="t"/>
+          <a:lstStyle/>
+          <a:p>
+            <a:pPr algn="l" marL="342900" indent="-342900">
+              <a:lnSpc>
+                <a:spcPts val="1620"/>
+              </a:lnSpc>
+              <a:spcAft>
+                <a:spcPts val="300"/>
+              </a:spcAft>
+              <a:buSzPct val="100000"/>
+              <a:buChar char="•"/>
+            </a:pPr>
+            <a:r>
+              <a:rPr lang="en-US" sz="1200" dirty="0">
+                <a:solidFill>
+                  <a:srgbClr val="1A1A1A"/>
+                </a:solidFill>
+                <a:latin typeface="Georgia" pitchFamily="34" charset="0"/>
+                <a:ea typeface="Georgia" pitchFamily="34" charset="-122"/>
+                <a:cs typeface="Georgia" pitchFamily="34" charset="-120"/>
+              </a:rPr>
+              <a:t>Pronunciation perfection is NOT the goal. Engagement with meaning is.</a:t>
+            </a:r>
+            <a:endParaRPr lang="en-US" sz="1200" dirty="0"/>
+          </a:p>
+          <a:p>
+            <a:pPr algn="l" marL="342900" indent="-342900">
+              <a:lnSpc>
+                <a:spcPts val="1620"/>
+              </a:lnSpc>
+              <a:spcAft>
+                <a:spcPts val="300"/>
+              </a:spcAft>
+              <a:buSzPct val="100000"/>
+              <a:buChar char="•"/>
+            </a:pPr>
+            <a:r>
+              <a:rPr lang="en-US" sz="1200" dirty="0">
+                <a:solidFill>
+                  <a:srgbClr val="1A1A1A"/>
+                </a:solidFill>
+                <a:latin typeface="Georgia" pitchFamily="34" charset="0"/>
+                <a:ea typeface="Georgia" pitchFamily="34" charset="-122"/>
+                <a:cs typeface="Georgia" pitchFamily="34" charset="-120"/>
+              </a:rPr>
+              <a:t>Some students will notice that the Upanishadic voice sounds "more modern philosophical." That's a real observation worth honouring.</a:t>
+            </a:r>
+            <a:endParaRPr lang="en-US" sz="1200" dirty="0"/>
+          </a:p>
+        </p:txBody>
+      </p:sp>
+      <p:sp>
+        <p:nvSpPr>
+          <p:cNvPr id="5" name="Text 3"/>
+          <p:cNvSpPr/>
+          <p:nvPr/>
+        </p:nvSpPr>
+        <p:spPr>
+          <a:xfrm>
+            <a:off x="406301" y="4434929"/>
+            <a:ext cx="8498026" cy="213271"/>
+          </a:xfrm>
+          <a:prstGeom prst="rect">
+            <a:avLst/>
+          </a:prstGeom>
+          <a:noFill/>
+          <a:ln/>
+        </p:spPr>
+        <p:txBody>
+          <a:bodyPr wrap="square" lIns="0" tIns="0" rIns="0" bIns="0" rtlCol="0" anchor="t"/>
+          <a:lstStyle/>
+          <a:p>
+            <a:pPr algn="l" indent="0" marL="0">
+              <a:lnSpc>
+                <a:spcPts val="1680"/>
+              </a:lnSpc>
+              <a:spcBef>
+                <a:spcPts val="300"/>
+              </a:spcBef>
+              <a:spcAft>
+                <a:spcPts val="300"/>
+              </a:spcAft>
+              <a:buNone/>
+            </a:pPr>
+            <a:r>
+              <a:rPr lang="en-US" sz="1200" dirty="0">
+                <a:solidFill>
+                  <a:srgbClr val="1A1A1A"/>
+                </a:solidFill>
+                <a:latin typeface="Georgia" pitchFamily="34" charset="0"/>
+                <a:ea typeface="Georgia" pitchFamily="34" charset="-122"/>
+                <a:cs typeface="Georgia" pitchFamily="34" charset="-120"/>
+              </a:rPr>
+              <a:t>Senior ·  · IKS Curriculum</a:t>
+            </a:r>
+            <a:endParaRPr lang="en-US" sz="1200" dirty="0"/>
+          </a:p>
+        </p:txBody>
+      </p:sp>
+    </p:spTree>
+  </p:cSld>
+  <p:clrMapOvr>
+    <a:masterClrMapping/>
+  </p:clrMapOvr>
+</p:sld>
+</file>
+
+<file path=ppt/slides/slide14.xml><?xml version="1.0" encoding="utf-8"?>
+<p:sld xmlns:a="http://schemas.openxmlformats.org/drawingml/2006/main" xmlns:r="http://schemas.openxmlformats.org/officeDocument/2006/relationships" xmlns:p="http://schemas.openxmlformats.org/presentationml/2006/main">
+  <p:cSld name="Slide 14">
+    <p:bg>
+      <p:bgPr>
+        <a:solidFill>
+          <a:srgbClr val="FAF7F2"/>
+        </a:solidFill>
+      </p:bgPr>
+    </p:bg>
+    <p:spTree>
+      <p:nvGrpSpPr>
+        <p:cNvPr id="1" name=""/>
+        <p:cNvGrpSpPr/>
+        <p:nvPr/>
+      </p:nvGrpSpPr>
+      <p:grpSpPr>
+        <a:xfrm>
+          <a:off x="0" y="0"/>
+          <a:ext cx="0" cy="0"/>
+          <a:chOff x="0" y="0"/>
+          <a:chExt cx="0" cy="0"/>
+        </a:xfrm>
+      </p:grpSpPr>
+      <p:sp>
+        <p:nvSpPr>
+          <p:cNvPr id="2" name="Text 0"/>
+          <p:cNvSpPr/>
+          <p:nvPr/>
+        </p:nvSpPr>
+        <p:spPr>
+          <a:xfrm>
+            <a:off x="0" y="0"/>
+            <a:ext cx="9144000" cy="101501"/>
+          </a:xfrm>
+          <a:prstGeom prst="rect">
+            <a:avLst/>
+          </a:prstGeom>
+          <a:solidFill>
+            <a:srgbClr val="5D1D2E"/>
+          </a:solidFill>
+          <a:ln/>
+        </p:spPr>
+        <p:txBody>
+          <a:bodyPr wrap="square" rtlCol="0" anchor="ctr"/>
+          <a:lstStyle/>
+          <a:p>
+            <a:pPr indent="0" marL="0">
+              <a:buNone/>
+            </a:pPr>
+            <a:endParaRPr lang="en-US" dirty="0"/>
+          </a:p>
+        </p:txBody>
+      </p:sp>
+      <p:sp>
+        <p:nvSpPr>
+          <p:cNvPr id="3" name="Text 1"/>
+          <p:cNvSpPr/>
+          <p:nvPr/>
+        </p:nvSpPr>
+        <p:spPr>
+          <a:xfrm>
+            <a:off x="406301" y="457051"/>
+            <a:ext cx="8498026" cy="274290"/>
+          </a:xfrm>
+          <a:prstGeom prst="rect">
+            <a:avLst/>
+          </a:prstGeom>
+          <a:noFill/>
+          <a:ln/>
+        </p:spPr>
+        <p:txBody>
+          <a:bodyPr wrap="square" lIns="0" tIns="0" rIns="0" bIns="0" rtlCol="0" anchor="t"/>
+          <a:lstStyle/>
+          <a:p>
+            <a:pPr algn="l" indent="0" marL="0">
+              <a:lnSpc>
+                <a:spcPts val="2160"/>
+              </a:lnSpc>
+              <a:spcBef>
+                <a:spcPts val="600"/>
+              </a:spcBef>
+              <a:spcAft>
+                <a:spcPts val="800"/>
+              </a:spcAft>
+              <a:buNone/>
+            </a:pPr>
+            <a:r>
+              <a:rPr lang="en-US" sz="1800" b="1" dirty="0">
+                <a:solidFill>
+                  <a:srgbClr val="997929"/>
+                </a:solidFill>
+                <a:latin typeface="Times New Roman" pitchFamily="34" charset="0"/>
+                <a:ea typeface="Times New Roman" pitchFamily="34" charset="-122"/>
+                <a:cs typeface="Times New Roman" pitchFamily="34" charset="-120"/>
+              </a:rPr>
+              <a:t>Citation(s) used</a:t>
+            </a:r>
+            <a:endParaRPr lang="en-US" sz="1800" dirty="0"/>
+          </a:p>
+        </p:txBody>
+      </p:sp>
+      <p:sp>
+        <p:nvSpPr>
+          <p:cNvPr id="4" name="Text 2"/>
+          <p:cNvSpPr/>
+          <p:nvPr/>
+        </p:nvSpPr>
+        <p:spPr>
+          <a:xfrm>
+            <a:off x="634901" y="883593"/>
+            <a:ext cx="8102798" cy="525661"/>
+          </a:xfrm>
+          <a:prstGeom prst="rect">
+            <a:avLst/>
+          </a:prstGeom>
+          <a:noFill/>
+          <a:ln/>
+        </p:spPr>
+        <p:txBody>
+          <a:bodyPr wrap="square" lIns="0" tIns="0" rIns="0" bIns="0" rtlCol="0" anchor="t"/>
+          <a:lstStyle/>
+          <a:p>
+            <a:pPr algn="l" marL="342900" indent="-342900">
+              <a:lnSpc>
+                <a:spcPts val="1620"/>
+              </a:lnSpc>
+              <a:spcAft>
+                <a:spcPts val="300"/>
+              </a:spcAft>
+              <a:buSzPct val="100000"/>
+              <a:buChar char="•"/>
+            </a:pPr>
+            <a:r>
+              <a:rPr lang="en-US" sz="1200" dirty="0">
+                <a:solidFill>
+                  <a:srgbClr val="1A1A1A"/>
+                </a:solidFill>
+                <a:latin typeface="Georgia" pitchFamily="34" charset="0"/>
+                <a:ea typeface="Georgia" pitchFamily="34" charset="-122"/>
+                <a:cs typeface="Georgia" pitchFamily="34" charset="-120"/>
+              </a:rPr>
+              <a:t>Jamison &amp; Brereton (2014) for Ṛg Veda 1.1.</a:t>
+            </a:r>
+            <a:endParaRPr lang="en-US" sz="1200" dirty="0"/>
+          </a:p>
+          <a:p>
+            <a:pPr algn="l" marL="342900" indent="-342900">
+              <a:lnSpc>
+                <a:spcPts val="1620"/>
+              </a:lnSpc>
+              <a:spcAft>
+                <a:spcPts val="300"/>
+              </a:spcAft>
+              <a:buSzPct val="100000"/>
+              <a:buChar char="•"/>
+            </a:pPr>
+            <a:r>
+              <a:rPr lang="en-US" sz="1200" dirty="0">
+                <a:solidFill>
+                  <a:srgbClr val="1A1A1A"/>
+                </a:solidFill>
+                <a:latin typeface="Georgia" pitchFamily="34" charset="0"/>
+                <a:ea typeface="Georgia" pitchFamily="34" charset="-122"/>
+                <a:cs typeface="Georgia" pitchFamily="34" charset="-120"/>
+              </a:rPr>
+              <a:t>Olivelle (1996) for Īśa Upaniṣad.</a:t>
             </a:r>
             <a:endParaRPr lang="en-US" sz="1200" dirty="0"/>
           </a:p>
@@ -2617,7 +3552,7 @@
                 <a:ea typeface="Times New Roman" pitchFamily="34" charset="-122"/>
                 <a:cs typeface="Times New Roman" pitchFamily="34" charset="-120"/>
               </a:rPr>
-              <a:t>Materials</a:t>
+              <a:t>Learning objective</a:t>
             </a:r>
             <a:endParaRPr lang="en-US" sz="1800" dirty="0"/>
           </a:p>
@@ -2665,7 +3600,7 @@
                 <a:ea typeface="Georgia" pitchFamily="34" charset="-122"/>
                 <a:cs typeface="Georgia" pitchFamily="34" charset="-120"/>
               </a:rPr>
-              <a:t>– Printed handout: Ṛg Veda 1.1 (Sanskrit + IAST + Jamison-Brereton translation) – Printed handout: Īśa Upaniṣad opening verse (Sanskrit + IAST + Olivelle translation)</a:t>
+              <a:t>Students read Ṛg Veda 1.1 and Īśa Upaniṣad opening in IAST with word-by-word gloss, and articulate the difference in tone between the two textual layers.</a:t>
             </a:r>
             <a:endParaRPr lang="en-US" sz="1200" dirty="0"/>
           </a:p>
@@ -2823,7 +3758,7 @@
                 <a:ea typeface="Times New Roman" pitchFamily="34" charset="-122"/>
                 <a:cs typeface="Times New Roman" pitchFamily="34" charset="-120"/>
               </a:rPr>
-              <a:t>Flow</a:t>
+              <a:t>Materials</a:t>
             </a:r>
             <a:endParaRPr lang="en-US" sz="1800" dirty="0"/>
           </a:p>
@@ -2832,6 +3767,76 @@
       <p:sp>
         <p:nvSpPr>
           <p:cNvPr id="4" name="Text 2"/>
+          <p:cNvSpPr/>
+          <p:nvPr/>
+        </p:nvSpPr>
+        <p:spPr>
+          <a:xfrm>
+            <a:off x="634901" y="883593"/>
+            <a:ext cx="8102798" cy="525661"/>
+          </a:xfrm>
+          <a:prstGeom prst="rect">
+            <a:avLst/>
+          </a:prstGeom>
+          <a:noFill/>
+          <a:ln/>
+        </p:spPr>
+        <p:txBody>
+          <a:bodyPr wrap="square" lIns="0" tIns="0" rIns="0" bIns="0" rtlCol="0" anchor="t"/>
+          <a:lstStyle/>
+          <a:p>
+            <a:pPr algn="l" marL="342900" indent="-342900">
+              <a:lnSpc>
+                <a:spcPts val="1620"/>
+              </a:lnSpc>
+              <a:spcAft>
+                <a:spcPts val="300"/>
+              </a:spcAft>
+              <a:buSzPct val="100000"/>
+              <a:buChar char="•"/>
+            </a:pPr>
+            <a:r>
+              <a:rPr lang="en-US" sz="1200" dirty="0">
+                <a:solidFill>
+                  <a:srgbClr val="1A1A1A"/>
+                </a:solidFill>
+                <a:latin typeface="Georgia" pitchFamily="34" charset="0"/>
+                <a:ea typeface="Georgia" pitchFamily="34" charset="-122"/>
+                <a:cs typeface="Georgia" pitchFamily="34" charset="-120"/>
+              </a:rPr>
+              <a:t>Printed handout: Ṛg Veda 1.1 (Sanskrit + IAST + Jamison-Brereton translation)</a:t>
+            </a:r>
+            <a:endParaRPr lang="en-US" sz="1200" dirty="0"/>
+          </a:p>
+          <a:p>
+            <a:pPr algn="l" marL="342900" indent="-342900">
+              <a:lnSpc>
+                <a:spcPts val="1620"/>
+              </a:lnSpc>
+              <a:spcAft>
+                <a:spcPts val="300"/>
+              </a:spcAft>
+              <a:buSzPct val="100000"/>
+              <a:buChar char="•"/>
+            </a:pPr>
+            <a:r>
+              <a:rPr lang="en-US" sz="1200" dirty="0">
+                <a:solidFill>
+                  <a:srgbClr val="1A1A1A"/>
+                </a:solidFill>
+                <a:latin typeface="Georgia" pitchFamily="34" charset="0"/>
+                <a:ea typeface="Georgia" pitchFamily="34" charset="-122"/>
+                <a:cs typeface="Georgia" pitchFamily="34" charset="-120"/>
+              </a:rPr>
+              <a:t>Printed handout: Īśa Upaniṣad opening verse (Sanskrit + IAST + Olivelle translation)</a:t>
+            </a:r>
+            <a:endParaRPr lang="en-US" sz="1200" dirty="0"/>
+          </a:p>
+        </p:txBody>
+      </p:sp>
+      <p:sp>
+        <p:nvSpPr>
+          <p:cNvPr id="5" name="Text 3"/>
           <p:cNvSpPr/>
           <p:nvPr/>
         </p:nvSpPr>
@@ -2981,7 +3986,7 @@
                 <a:ea typeface="Times New Roman" pitchFamily="34" charset="-122"/>
                 <a:cs typeface="Times New Roman" pitchFamily="34" charset="-120"/>
               </a:rPr>
-              <a:t>Warm-up (5 min)</a:t>
+              <a:t>Flow</a:t>
             </a:r>
             <a:endParaRPr lang="en-US" sz="1800" dirty="0"/>
           </a:p>
@@ -2990,54 +3995,6 @@
       <p:sp>
         <p:nvSpPr>
           <p:cNvPr id="4" name="Text 2"/>
-          <p:cNvSpPr/>
-          <p:nvPr/>
-        </p:nvSpPr>
-        <p:spPr>
-          <a:xfrm>
-            <a:off x="406301" y="870942"/>
-            <a:ext cx="8498026" cy="213271"/>
-          </a:xfrm>
-          <a:prstGeom prst="rect">
-            <a:avLst/>
-          </a:prstGeom>
-          <a:noFill/>
-          <a:ln/>
-        </p:spPr>
-        <p:txBody>
-          <a:bodyPr wrap="square" lIns="0" tIns="0" rIns="0" bIns="0" rtlCol="0" anchor="t"/>
-          <a:lstStyle/>
-          <a:p>
-            <a:pPr algn="l" indent="0" marL="0">
-              <a:lnSpc>
-                <a:spcPts val="1680"/>
-              </a:lnSpc>
-              <a:spcBef>
-                <a:spcPts val="300"/>
-              </a:spcBef>
-              <a:spcAft>
-                <a:spcPts val="300"/>
-              </a:spcAft>
-              <a:buNone/>
-            </a:pPr>
-            <a:r>
-              <a:rPr lang="en-US" sz="1200" dirty="0">
-                <a:solidFill>
-                  <a:srgbClr val="1A1A1A"/>
-                </a:solidFill>
-                <a:latin typeface="Georgia" pitchFamily="34" charset="0"/>
-                <a:ea typeface="Georgia" pitchFamily="34" charset="-122"/>
-                <a:cs typeface="Georgia" pitchFamily="34" charset="-120"/>
-              </a:rPr>
-              <a:t>Recall: what are the four textual layers of the Veda? (Saṃhitā → Brāhmaṇa → Āraṇyaka → Upaniṣad.)</a:t>
-            </a:r>
-            <a:endParaRPr lang="en-US" sz="1200" dirty="0"/>
-          </a:p>
-        </p:txBody>
-      </p:sp>
-      <p:sp>
-        <p:nvSpPr>
-          <p:cNvPr id="5" name="Text 3"/>
           <p:cNvSpPr/>
           <p:nvPr/>
         </p:nvSpPr>
@@ -3187,7 +4144,7 @@
                 <a:ea typeface="Times New Roman" pitchFamily="34" charset="-122"/>
                 <a:cs typeface="Times New Roman" pitchFamily="34" charset="-120"/>
               </a:rPr>
-              <a:t>Reading 1: Ṛg Veda 1.1 (15 min)</a:t>
+              <a:t>Warm-up (5 min)</a:t>
             </a:r>
             <a:endParaRPr lang="en-US" sz="1800" dirty="0"/>
           </a:p>
@@ -3201,177 +4158,7 @@
         </p:nvSpPr>
         <p:spPr>
           <a:xfrm>
-            <a:off x="406301" y="883593"/>
-            <a:ext cx="8331398" cy="842963"/>
-          </a:xfrm>
-          <a:prstGeom prst="rect">
-            <a:avLst/>
-          </a:prstGeom>
-          <a:solidFill>
-            <a:srgbClr val="FFFFFF"/>
-          </a:solidFill>
-          <a:ln/>
-        </p:spPr>
-        <p:txBody>
-          <a:bodyPr wrap="square" rtlCol="0" anchor="ctr"/>
-          <a:lstStyle/>
-          <a:p>
-            <a:pPr indent="0" marL="0">
-              <a:buNone/>
-            </a:pPr>
-            <a:endParaRPr lang="en-US" dirty="0"/>
-          </a:p>
-        </p:txBody>
-      </p:sp>
-      <p:sp>
-        <p:nvSpPr>
-          <p:cNvPr id="5" name="Shape 3"/>
-          <p:cNvSpPr/>
-          <p:nvPr/>
-        </p:nvSpPr>
-        <p:spPr>
-          <a:xfrm>
-            <a:off x="434876" y="883593"/>
-            <a:ext cx="0" cy="842963"/>
-          </a:xfrm>
-          <a:prstGeom prst="line">
-            <a:avLst/>
-          </a:prstGeom>
-          <a:noFill/>
-          <a:ln w="57150">
-            <a:solidFill>
-              <a:srgbClr val="997929"/>
-            </a:solidFill>
-            <a:prstDash val="solid"/>
-          </a:ln>
-        </p:spPr>
-      </p:sp>
-      <p:sp>
-        <p:nvSpPr>
-          <p:cNvPr id="6" name="Text 4"/>
-          <p:cNvSpPr/>
-          <p:nvPr/>
-        </p:nvSpPr>
-        <p:spPr>
-          <a:xfrm>
-            <a:off x="692051" y="1074093"/>
-            <a:ext cx="7973389" cy="461963"/>
-          </a:xfrm>
-          <a:prstGeom prst="rect">
-            <a:avLst/>
-          </a:prstGeom>
-          <a:noFill/>
-          <a:ln/>
-        </p:spPr>
-        <p:txBody>
-          <a:bodyPr wrap="square" lIns="0" tIns="0" rIns="0" bIns="0" rtlCol="0" anchor="t"/>
-          <a:lstStyle/>
-          <a:p>
-            <a:pPr algn="l" indent="0" marL="0">
-              <a:lnSpc>
-                <a:spcPts val="1820"/>
-              </a:lnSpc>
-              <a:spcBef>
-                <a:spcPts val="300"/>
-              </a:spcBef>
-              <a:spcAft>
-                <a:spcPts val="300"/>
-              </a:spcAft>
-              <a:buNone/>
-            </a:pPr>
-            <a:r>
-              <a:rPr lang="en-US" sz="1300" i="1" dirty="0">
-                <a:solidFill>
-                  <a:srgbClr val="1A1A1A"/>
-                </a:solidFill>
-                <a:latin typeface="Times New Roman" pitchFamily="34" charset="0"/>
-                <a:ea typeface="Times New Roman" pitchFamily="34" charset="-122"/>
-                <a:cs typeface="Times New Roman" pitchFamily="34" charset="-120"/>
-              </a:rPr>
-              <a:t>agnim īḷe purohitaṁ yajñasya devam ṛtvijam</a:t>
-            </a:r>
-            <a:pPr algn="l" indent="0" marL="0">
-              <a:lnSpc>
-                <a:spcPts val="1820"/>
-              </a:lnSpc>
-              <a:spcBef>
-                <a:spcPts val="300"/>
-              </a:spcBef>
-              <a:spcAft>
-                <a:spcPts val="300"/>
-              </a:spcAft>
-              <a:buNone/>
-            </a:pPr>
-            <a:r>
-              <a:rPr lang="en-US" sz="1300" dirty="0">
-                <a:solidFill>
-                  <a:srgbClr val="1A1A1A"/>
-                </a:solidFill>
-                <a:latin typeface="Times New Roman" pitchFamily="34" charset="0"/>
-                <a:ea typeface="Times New Roman" pitchFamily="34" charset="-122"/>
-                <a:cs typeface="Times New Roman" pitchFamily="34" charset="-120"/>
-              </a:rPr>
-              <a:t> </a:t>
-            </a:r>
-            <a:pPr algn="l" indent="0" marL="0">
-              <a:lnSpc>
-                <a:spcPts val="1820"/>
-              </a:lnSpc>
-              <a:spcBef>
-                <a:spcPts val="300"/>
-              </a:spcBef>
-              <a:spcAft>
-                <a:spcPts val="300"/>
-              </a:spcAft>
-              <a:buNone/>
-            </a:pPr>
-            <a:r>
-              <a:rPr lang="en-US" sz="1300" i="1" dirty="0">
-                <a:solidFill>
-                  <a:srgbClr val="1A1A1A"/>
-                </a:solidFill>
-                <a:latin typeface="Times New Roman" pitchFamily="34" charset="0"/>
-                <a:ea typeface="Times New Roman" pitchFamily="34" charset="-122"/>
-                <a:cs typeface="Times New Roman" pitchFamily="34" charset="-120"/>
-              </a:rPr>
-              <a:t>hotāraṁ ratnadhātamam</a:t>
-            </a:r>
-            <a:pPr algn="l" indent="0" marL="0">
-              <a:lnSpc>
-                <a:spcPts val="1820"/>
-              </a:lnSpc>
-              <a:spcBef>
-                <a:spcPts val="300"/>
-              </a:spcBef>
-              <a:spcAft>
-                <a:spcPts val="300"/>
-              </a:spcAft>
-              <a:buNone/>
-            </a:pPr>
-            <a:r>
-              <a:rPr lang="en-US" sz="1300" dirty="0">
-                <a:solidFill>
-                  <a:srgbClr val="1A1A1A"/>
-                </a:solidFill>
-                <a:latin typeface="Times New Roman" pitchFamily="34" charset="0"/>
-                <a:ea typeface="Times New Roman" pitchFamily="34" charset="-122"/>
-                <a:cs typeface="Times New Roman" pitchFamily="34" charset="-120"/>
-              </a:rPr>
-              <a:t> "I praise Agni, the household priest, the divine officiant of the sacrifice, the invoker, who is the best bestower of treasures."</a:t>
-            </a:r>
-            <a:endParaRPr lang="en-US" sz="1300" dirty="0"/>
-          </a:p>
-        </p:txBody>
-      </p:sp>
-      <p:sp>
-        <p:nvSpPr>
-          <p:cNvPr id="7" name="Text 5"/>
-          <p:cNvSpPr/>
-          <p:nvPr/>
-        </p:nvSpPr>
-        <p:spPr>
-          <a:xfrm>
-            <a:off x="406301" y="1815405"/>
+            <a:off x="406301" y="870942"/>
             <a:ext cx="8498026" cy="213271"/>
           </a:xfrm>
           <a:prstGeom prst="rect">
@@ -3405,191 +4192,7 @@
                 <a:ea typeface="Georgia" pitchFamily="34" charset="-122"/>
                 <a:cs typeface="Georgia" pitchFamily="34" charset="-120"/>
               </a:rPr>
-              <a:t>– Word-by-word: </a:t>
-            </a:r>
-            <a:pPr algn="l" indent="0" marL="0">
-              <a:lnSpc>
-                <a:spcPts val="1680"/>
-              </a:lnSpc>
-              <a:spcBef>
-                <a:spcPts val="300"/>
-              </a:spcBef>
-              <a:spcAft>
-                <a:spcPts val="300"/>
-              </a:spcAft>
-              <a:buNone/>
-            </a:pPr>
-            <a:r>
-              <a:rPr lang="en-US" sz="1200" i="1" dirty="0">
-                <a:solidFill>
-                  <a:srgbClr val="1A1A1A"/>
-                </a:solidFill>
-                <a:latin typeface="Georgia" pitchFamily="34" charset="0"/>
-                <a:ea typeface="Georgia" pitchFamily="34" charset="-122"/>
-                <a:cs typeface="Georgia" pitchFamily="34" charset="-120"/>
-              </a:rPr>
-              <a:t>agnim</a:t>
-            </a:r>
-            <a:pPr algn="l" indent="0" marL="0">
-              <a:lnSpc>
-                <a:spcPts val="1680"/>
-              </a:lnSpc>
-              <a:spcBef>
-                <a:spcPts val="300"/>
-              </a:spcBef>
-              <a:spcAft>
-                <a:spcPts val="300"/>
-              </a:spcAft>
-              <a:buNone/>
-            </a:pPr>
-            <a:r>
-              <a:rPr lang="en-US" sz="1200" dirty="0">
-                <a:solidFill>
-                  <a:srgbClr val="1A1A1A"/>
-                </a:solidFill>
-                <a:latin typeface="Georgia" pitchFamily="34" charset="0"/>
-                <a:ea typeface="Georgia" pitchFamily="34" charset="-122"/>
-                <a:cs typeface="Georgia" pitchFamily="34" charset="-120"/>
-              </a:rPr>
-              <a:t> (Agni, acc.) + </a:t>
-            </a:r>
-            <a:pPr algn="l" indent="0" marL="0">
-              <a:lnSpc>
-                <a:spcPts val="1680"/>
-              </a:lnSpc>
-              <a:spcBef>
-                <a:spcPts val="300"/>
-              </a:spcBef>
-              <a:spcAft>
-                <a:spcPts val="300"/>
-              </a:spcAft>
-              <a:buNone/>
-            </a:pPr>
-            <a:r>
-              <a:rPr lang="en-US" sz="1200" i="1" dirty="0">
-                <a:solidFill>
-                  <a:srgbClr val="1A1A1A"/>
-                </a:solidFill>
-                <a:latin typeface="Georgia" pitchFamily="34" charset="0"/>
-                <a:ea typeface="Georgia" pitchFamily="34" charset="-122"/>
-                <a:cs typeface="Georgia" pitchFamily="34" charset="-120"/>
-              </a:rPr>
-              <a:t>īḷe</a:t>
-            </a:r>
-            <a:pPr algn="l" indent="0" marL="0">
-              <a:lnSpc>
-                <a:spcPts val="1680"/>
-              </a:lnSpc>
-              <a:spcBef>
-                <a:spcPts val="300"/>
-              </a:spcBef>
-              <a:spcAft>
-                <a:spcPts val="300"/>
-              </a:spcAft>
-              <a:buNone/>
-            </a:pPr>
-            <a:r>
-              <a:rPr lang="en-US" sz="1200" dirty="0">
-                <a:solidFill>
-                  <a:srgbClr val="1A1A1A"/>
-                </a:solidFill>
-                <a:latin typeface="Georgia" pitchFamily="34" charset="0"/>
-                <a:ea typeface="Georgia" pitchFamily="34" charset="-122"/>
-                <a:cs typeface="Georgia" pitchFamily="34" charset="-120"/>
-              </a:rPr>
-              <a:t> (I praise) + </a:t>
-            </a:r>
-            <a:pPr algn="l" indent="0" marL="0">
-              <a:lnSpc>
-                <a:spcPts val="1680"/>
-              </a:lnSpc>
-              <a:spcBef>
-                <a:spcPts val="300"/>
-              </a:spcBef>
-              <a:spcAft>
-                <a:spcPts val="300"/>
-              </a:spcAft>
-              <a:buNone/>
-            </a:pPr>
-            <a:r>
-              <a:rPr lang="en-US" sz="1200" i="1" dirty="0">
-                <a:solidFill>
-                  <a:srgbClr val="1A1A1A"/>
-                </a:solidFill>
-                <a:latin typeface="Georgia" pitchFamily="34" charset="0"/>
-                <a:ea typeface="Georgia" pitchFamily="34" charset="-122"/>
-                <a:cs typeface="Georgia" pitchFamily="34" charset="-120"/>
-              </a:rPr>
-              <a:t>purohitam</a:t>
-            </a:r>
-            <a:pPr algn="l" indent="0" marL="0">
-              <a:lnSpc>
-                <a:spcPts val="1680"/>
-              </a:lnSpc>
-              <a:spcBef>
-                <a:spcPts val="300"/>
-              </a:spcBef>
-              <a:spcAft>
-                <a:spcPts val="300"/>
-              </a:spcAft>
-              <a:buNone/>
-            </a:pPr>
-            <a:r>
-              <a:rPr lang="en-US" sz="1200" dirty="0">
-                <a:solidFill>
-                  <a:srgbClr val="1A1A1A"/>
-                </a:solidFill>
-                <a:latin typeface="Georgia" pitchFamily="34" charset="0"/>
-                <a:ea typeface="Georgia" pitchFamily="34" charset="-122"/>
-                <a:cs typeface="Georgia" pitchFamily="34" charset="-120"/>
-              </a:rPr>
-              <a:t> (household priest) + </a:t>
-            </a:r>
-            <a:pPr algn="l" indent="0" marL="0">
-              <a:lnSpc>
-                <a:spcPts val="1680"/>
-              </a:lnSpc>
-              <a:spcBef>
-                <a:spcPts val="300"/>
-              </a:spcBef>
-              <a:spcAft>
-                <a:spcPts val="300"/>
-              </a:spcAft>
-              <a:buNone/>
-            </a:pPr>
-            <a:r>
-              <a:rPr lang="en-US" sz="1200" i="1" dirty="0">
-                <a:solidFill>
-                  <a:srgbClr val="1A1A1A"/>
-                </a:solidFill>
-                <a:latin typeface="Georgia" pitchFamily="34" charset="0"/>
-                <a:ea typeface="Georgia" pitchFamily="34" charset="-122"/>
-                <a:cs typeface="Georgia" pitchFamily="34" charset="-120"/>
-              </a:rPr>
-              <a:t>yajñasya</a:t>
-            </a:r>
-            <a:pPr algn="l" indent="0" marL="0">
-              <a:lnSpc>
-                <a:spcPts val="1680"/>
-              </a:lnSpc>
-              <a:spcBef>
-                <a:spcPts val="300"/>
-              </a:spcBef>
-              <a:spcAft>
-                <a:spcPts val="300"/>
-              </a:spcAft>
-              <a:buNone/>
-            </a:pPr>
-            <a:r>
-              <a:rPr lang="en-US" sz="1200" dirty="0">
-                <a:solidFill>
-                  <a:srgbClr val="1A1A1A"/>
-                </a:solidFill>
-                <a:latin typeface="Georgia" pitchFamily="34" charset="0"/>
-                <a:ea typeface="Georgia" pitchFamily="34" charset="-122"/>
-                <a:cs typeface="Georgia" pitchFamily="34" charset="-120"/>
-              </a:rPr>
-              <a:t> (of the sacrifice, gen.) ...</a:t>
+              <a:t>Recall: what are the four textual layers of the Veda? (Saṃhitā → Brāhmaṇa → Āraṇyaka → Upaniṣad.)</a:t>
             </a:r>
             <a:endParaRPr lang="en-US" sz="1200" dirty="0"/>
           </a:p>
@@ -3597,121 +4200,7 @@
       </p:sp>
       <p:sp>
         <p:nvSpPr>
-          <p:cNvPr id="8" name="Text 6"/>
-          <p:cNvSpPr/>
-          <p:nvPr/>
-        </p:nvSpPr>
-        <p:spPr>
-          <a:xfrm>
-            <a:off x="634901" y="2117527"/>
-            <a:ext cx="8102798" cy="281880"/>
-          </a:xfrm>
-          <a:prstGeom prst="rect">
-            <a:avLst/>
-          </a:prstGeom>
-          <a:noFill/>
-          <a:ln/>
-        </p:spPr>
-        <p:txBody>
-          <a:bodyPr wrap="square" lIns="0" tIns="0" rIns="0" bIns="0" rtlCol="0" anchor="t"/>
-          <a:lstStyle/>
-          <a:p>
-            <a:pPr algn="l" marL="342900" indent="-342900">
-              <a:lnSpc>
-                <a:spcPts val="1620"/>
-              </a:lnSpc>
-              <a:spcAft>
-                <a:spcPts val="300"/>
-              </a:spcAft>
-              <a:buSzPct val="100000"/>
-              <a:buChar char="•"/>
-            </a:pPr>
-            <a:r>
-              <a:rPr lang="en-US" sz="1200" b="1" dirty="0">
-                <a:solidFill>
-                  <a:srgbClr val="1A1A1A"/>
-                </a:solidFill>
-                <a:latin typeface="Georgia" pitchFamily="34" charset="0"/>
-                <a:ea typeface="Georgia" pitchFamily="34" charset="-122"/>
-                <a:cs typeface="Georgia" pitchFamily="34" charset="-120"/>
-              </a:rPr>
-              <a:t>Note:</a:t>
-            </a:r>
-            <a:pPr algn="l" indent="0" marL="0">
-              <a:lnSpc>
-                <a:spcPts val="1620"/>
-              </a:lnSpc>
-              <a:spcAft>
-                <a:spcPts val="300"/>
-              </a:spcAft>
-              <a:buNone/>
-            </a:pPr>
-            <a:r>
-              <a:rPr lang="en-US" sz="1200" dirty="0">
-                <a:solidFill>
-                  <a:srgbClr val="1A1A1A"/>
-                </a:solidFill>
-                <a:latin typeface="Georgia" pitchFamily="34" charset="0"/>
-                <a:ea typeface="Georgia" pitchFamily="34" charset="-122"/>
-                <a:cs typeface="Georgia" pitchFamily="34" charset="-120"/>
-              </a:rPr>
-              <a:t> this is a hymn of praise. The earliest layer of the Veda is ritual-centric.</a:t>
-            </a:r>
-            <a:endParaRPr lang="en-US" sz="1200" dirty="0"/>
-          </a:p>
-        </p:txBody>
-      </p:sp>
-      <p:sp>
-        <p:nvSpPr>
-          <p:cNvPr id="9" name="Text 7"/>
-          <p:cNvSpPr/>
-          <p:nvPr/>
-        </p:nvSpPr>
-        <p:spPr>
-          <a:xfrm>
-            <a:off x="406301" y="2488257"/>
-            <a:ext cx="8498026" cy="426541"/>
-          </a:xfrm>
-          <a:prstGeom prst="rect">
-            <a:avLst/>
-          </a:prstGeom>
-          <a:noFill/>
-          <a:ln/>
-        </p:spPr>
-        <p:txBody>
-          <a:bodyPr wrap="square" lIns="0" tIns="0" rIns="0" bIns="0" rtlCol="0" anchor="t"/>
-          <a:lstStyle/>
-          <a:p>
-            <a:pPr algn="l" indent="0" marL="0">
-              <a:lnSpc>
-                <a:spcPts val="1680"/>
-              </a:lnSpc>
-              <a:spcBef>
-                <a:spcPts val="300"/>
-              </a:spcBef>
-              <a:spcAft>
-                <a:spcPts val="300"/>
-              </a:spcAft>
-              <a:buNone/>
-            </a:pPr>
-            <a:r>
-              <a:rPr lang="en-US" sz="1200" dirty="0">
-                <a:solidFill>
-                  <a:srgbClr val="1A1A1A"/>
-                </a:solidFill>
-                <a:latin typeface="Georgia" pitchFamily="34" charset="0"/>
-                <a:ea typeface="Georgia" pitchFamily="34" charset="-122"/>
-                <a:cs typeface="Georgia" pitchFamily="34" charset="-120"/>
-              </a:rPr>
-              <a:t>– The intellectual contribution at this layer: precise oral transmission (across ~3000 years) generated the linguistic discipline that became Pāṇini.</a:t>
-            </a:r>
-            <a:endParaRPr lang="en-US" sz="1200" dirty="0"/>
-          </a:p>
-        </p:txBody>
-      </p:sp>
-      <p:sp>
-        <p:nvSpPr>
-          <p:cNvPr id="10" name="Text 8"/>
+          <p:cNvPr id="5" name="Text 3"/>
           <p:cNvSpPr/>
           <p:nvPr/>
         </p:nvSpPr>
@@ -3861,7 +4350,7 @@
                 <a:ea typeface="Times New Roman" pitchFamily="34" charset="-122"/>
                 <a:cs typeface="Times New Roman" pitchFamily="34" charset="-120"/>
               </a:rPr>
-              <a:t>Reading 2: Īśa Upaniṣad opening (15 min)</a:t>
+              <a:t>Reading 1: Ṛg Veda 1.1 (15 min)</a:t>
             </a:r>
             <a:endParaRPr lang="en-US" sz="1800" dirty="0"/>
           </a:p>
@@ -3876,7 +4365,7 @@
         <p:spPr>
           <a:xfrm>
             <a:off x="406301" y="883593"/>
-            <a:ext cx="8331398" cy="1073944"/>
+            <a:ext cx="8331398" cy="842963"/>
           </a:xfrm>
           <a:prstGeom prst="rect">
             <a:avLst/>
@@ -3906,7 +4395,7 @@
         <p:spPr>
           <a:xfrm>
             <a:off x="434876" y="883593"/>
-            <a:ext cx="0" cy="1073944"/>
+            <a:ext cx="0" cy="842963"/>
           </a:xfrm>
           <a:prstGeom prst="line">
             <a:avLst/>
@@ -3929,7 +4418,7 @@
         <p:spPr>
           <a:xfrm>
             <a:off x="692051" y="1074093"/>
-            <a:ext cx="7973389" cy="692944"/>
+            <a:ext cx="7973389" cy="461963"/>
           </a:xfrm>
           <a:prstGeom prst="rect">
             <a:avLst/>
@@ -3962,7 +4451,7 @@
                 <a:ea typeface="Times New Roman" pitchFamily="34" charset="-122"/>
                 <a:cs typeface="Times New Roman" pitchFamily="34" charset="-120"/>
               </a:rPr>
-              <a:t>īśā vāsyam idaṁ sarvaṁ yat kiñca jagatyāṁ jagat</a:t>
+              <a:t>agnim īḷe purohitaṁ yajñasya devam ṛtvijam</a:t>
             </a:r>
             <a:pPr algn="l" indent="0" marL="0">
               <a:lnSpc>
@@ -4008,7 +4497,7 @@
                 <a:ea typeface="Times New Roman" pitchFamily="34" charset="-122"/>
                 <a:cs typeface="Times New Roman" pitchFamily="34" charset="-120"/>
               </a:rPr>
-              <a:t>tena tyaktena bhuñjīthā mā gṛdhaḥ kasya svid dhanam</a:t>
+              <a:t>hotāraṁ ratnadhātamam</a:t>
             </a:r>
             <a:pPr algn="l" indent="0" marL="0">
               <a:lnSpc>
@@ -4031,7 +4520,7 @@
                 <a:ea typeface="Times New Roman" pitchFamily="34" charset="-122"/>
                 <a:cs typeface="Times New Roman" pitchFamily="34" charset="-120"/>
               </a:rPr>
-              <a:t> "Whatever moves in this moving world is enveloped by the Lord. Enjoy what has been abandoned. Do not covet anyone's wealth."</a:t>
+              <a:t> "I praise Agni, the household priest, the divine officiant of the sacrifice, the invoker, who is the best bestower of treasures."</a:t>
             </a:r>
             <a:endParaRPr lang="en-US" sz="1300" dirty="0"/>
           </a:p>
@@ -4040,306 +4529,6 @@
       <p:sp>
         <p:nvSpPr>
           <p:cNvPr id="7" name="Text 5"/>
-          <p:cNvSpPr/>
-          <p:nvPr/>
-        </p:nvSpPr>
-        <p:spPr>
-          <a:xfrm>
-            <a:off x="406301" y="2046387"/>
-            <a:ext cx="8498026" cy="213271"/>
-          </a:xfrm>
-          <a:prstGeom prst="rect">
-            <a:avLst/>
-          </a:prstGeom>
-          <a:noFill/>
-          <a:ln/>
-        </p:spPr>
-        <p:txBody>
-          <a:bodyPr wrap="square" lIns="0" tIns="0" rIns="0" bIns="0" rtlCol="0" anchor="t"/>
-          <a:lstStyle/>
-          <a:p>
-            <a:pPr algn="l" indent="0" marL="0">
-              <a:lnSpc>
-                <a:spcPts val="1680"/>
-              </a:lnSpc>
-              <a:spcBef>
-                <a:spcPts val="300"/>
-              </a:spcBef>
-              <a:spcAft>
-                <a:spcPts val="300"/>
-              </a:spcAft>
-              <a:buNone/>
-            </a:pPr>
-            <a:r>
-              <a:rPr lang="en-US" sz="1200" dirty="0">
-                <a:solidFill>
-                  <a:srgbClr val="1A1A1A"/>
-                </a:solidFill>
-                <a:latin typeface="Georgia" pitchFamily="34" charset="0"/>
-                <a:ea typeface="Georgia" pitchFamily="34" charset="-122"/>
-                <a:cs typeface="Georgia" pitchFamily="34" charset="-120"/>
-              </a:rPr>
-              <a:t>– Word-by-word: </a:t>
-            </a:r>
-            <a:pPr algn="l" indent="0" marL="0">
-              <a:lnSpc>
-                <a:spcPts val="1680"/>
-              </a:lnSpc>
-              <a:spcBef>
-                <a:spcPts val="300"/>
-              </a:spcBef>
-              <a:spcAft>
-                <a:spcPts val="300"/>
-              </a:spcAft>
-              <a:buNone/>
-            </a:pPr>
-            <a:r>
-              <a:rPr lang="en-US" sz="1200" i="1" dirty="0">
-                <a:solidFill>
-                  <a:srgbClr val="1A1A1A"/>
-                </a:solidFill>
-                <a:latin typeface="Georgia" pitchFamily="34" charset="0"/>
-                <a:ea typeface="Georgia" pitchFamily="34" charset="-122"/>
-                <a:cs typeface="Georgia" pitchFamily="34" charset="-120"/>
-              </a:rPr>
-              <a:t>īśā</a:t>
-            </a:r>
-            <a:pPr algn="l" indent="0" marL="0">
-              <a:lnSpc>
-                <a:spcPts val="1680"/>
-              </a:lnSpc>
-              <a:spcBef>
-                <a:spcPts val="300"/>
-              </a:spcBef>
-              <a:spcAft>
-                <a:spcPts val="300"/>
-              </a:spcAft>
-              <a:buNone/>
-            </a:pPr>
-            <a:r>
-              <a:rPr lang="en-US" sz="1200" dirty="0">
-                <a:solidFill>
-                  <a:srgbClr val="1A1A1A"/>
-                </a:solidFill>
-                <a:latin typeface="Georgia" pitchFamily="34" charset="0"/>
-                <a:ea typeface="Georgia" pitchFamily="34" charset="-122"/>
-                <a:cs typeface="Georgia" pitchFamily="34" charset="-120"/>
-              </a:rPr>
-              <a:t> (by the Lord, inst.) + </a:t>
-            </a:r>
-            <a:pPr algn="l" indent="0" marL="0">
-              <a:lnSpc>
-                <a:spcPts val="1680"/>
-              </a:lnSpc>
-              <a:spcBef>
-                <a:spcPts val="300"/>
-              </a:spcBef>
-              <a:spcAft>
-                <a:spcPts val="300"/>
-              </a:spcAft>
-              <a:buNone/>
-            </a:pPr>
-            <a:r>
-              <a:rPr lang="en-US" sz="1200" i="1" dirty="0">
-                <a:solidFill>
-                  <a:srgbClr val="1A1A1A"/>
-                </a:solidFill>
-                <a:latin typeface="Georgia" pitchFamily="34" charset="0"/>
-                <a:ea typeface="Georgia" pitchFamily="34" charset="-122"/>
-                <a:cs typeface="Georgia" pitchFamily="34" charset="-120"/>
-              </a:rPr>
-              <a:t>vāsyam</a:t>
-            </a:r>
-            <a:pPr algn="l" indent="0" marL="0">
-              <a:lnSpc>
-                <a:spcPts val="1680"/>
-              </a:lnSpc>
-              <a:spcBef>
-                <a:spcPts val="300"/>
-              </a:spcBef>
-              <a:spcAft>
-                <a:spcPts val="300"/>
-              </a:spcAft>
-              <a:buNone/>
-            </a:pPr>
-            <a:r>
-              <a:rPr lang="en-US" sz="1200" dirty="0">
-                <a:solidFill>
-                  <a:srgbClr val="1A1A1A"/>
-                </a:solidFill>
-                <a:latin typeface="Georgia" pitchFamily="34" charset="0"/>
-                <a:ea typeface="Georgia" pitchFamily="34" charset="-122"/>
-                <a:cs typeface="Georgia" pitchFamily="34" charset="-120"/>
-              </a:rPr>
-              <a:t> (to be enveloped) + </a:t>
-            </a:r>
-            <a:pPr algn="l" indent="0" marL="0">
-              <a:lnSpc>
-                <a:spcPts val="1680"/>
-              </a:lnSpc>
-              <a:spcBef>
-                <a:spcPts val="300"/>
-              </a:spcBef>
-              <a:spcAft>
-                <a:spcPts val="300"/>
-              </a:spcAft>
-              <a:buNone/>
-            </a:pPr>
-            <a:r>
-              <a:rPr lang="en-US" sz="1200" i="1" dirty="0">
-                <a:solidFill>
-                  <a:srgbClr val="1A1A1A"/>
-                </a:solidFill>
-                <a:latin typeface="Georgia" pitchFamily="34" charset="0"/>
-                <a:ea typeface="Georgia" pitchFamily="34" charset="-122"/>
-                <a:cs typeface="Georgia" pitchFamily="34" charset="-120"/>
-              </a:rPr>
-              <a:t>idam sarvam</a:t>
-            </a:r>
-            <a:pPr algn="l" indent="0" marL="0">
-              <a:lnSpc>
-                <a:spcPts val="1680"/>
-              </a:lnSpc>
-              <a:spcBef>
-                <a:spcPts val="300"/>
-              </a:spcBef>
-              <a:spcAft>
-                <a:spcPts val="300"/>
-              </a:spcAft>
-              <a:buNone/>
-            </a:pPr>
-            <a:r>
-              <a:rPr lang="en-US" sz="1200" dirty="0">
-                <a:solidFill>
-                  <a:srgbClr val="1A1A1A"/>
-                </a:solidFill>
-                <a:latin typeface="Georgia" pitchFamily="34" charset="0"/>
-                <a:ea typeface="Georgia" pitchFamily="34" charset="-122"/>
-                <a:cs typeface="Georgia" pitchFamily="34" charset="-120"/>
-              </a:rPr>
-              <a:t> (all this) ...</a:t>
-            </a:r>
-            <a:endParaRPr lang="en-US" sz="1200" dirty="0"/>
-          </a:p>
-        </p:txBody>
-      </p:sp>
-      <p:sp>
-        <p:nvSpPr>
-          <p:cNvPr id="8" name="Text 6"/>
-          <p:cNvSpPr/>
-          <p:nvPr/>
-        </p:nvSpPr>
-        <p:spPr>
-          <a:xfrm>
-            <a:off x="634901" y="2348508"/>
-            <a:ext cx="8102798" cy="281880"/>
-          </a:xfrm>
-          <a:prstGeom prst="rect">
-            <a:avLst/>
-          </a:prstGeom>
-          <a:noFill/>
-          <a:ln/>
-        </p:spPr>
-        <p:txBody>
-          <a:bodyPr wrap="square" lIns="0" tIns="0" rIns="0" bIns="0" rtlCol="0" anchor="t"/>
-          <a:lstStyle/>
-          <a:p>
-            <a:pPr algn="l" marL="342900" indent="-342900">
-              <a:lnSpc>
-                <a:spcPts val="1620"/>
-              </a:lnSpc>
-              <a:spcAft>
-                <a:spcPts val="300"/>
-              </a:spcAft>
-              <a:buSzPct val="100000"/>
-              <a:buChar char="•"/>
-            </a:pPr>
-            <a:r>
-              <a:rPr lang="en-US" sz="1200" b="1" dirty="0">
-                <a:solidFill>
-                  <a:srgbClr val="1A1A1A"/>
-                </a:solidFill>
-                <a:latin typeface="Georgia" pitchFamily="34" charset="0"/>
-                <a:ea typeface="Georgia" pitchFamily="34" charset="-122"/>
-                <a:cs typeface="Georgia" pitchFamily="34" charset="-120"/>
-              </a:rPr>
-              <a:t>Note the move.</a:t>
-            </a:r>
-            <a:pPr algn="l" indent="0" marL="0">
-              <a:lnSpc>
-                <a:spcPts val="1620"/>
-              </a:lnSpc>
-              <a:spcAft>
-                <a:spcPts val="300"/>
-              </a:spcAft>
-              <a:buNone/>
-            </a:pPr>
-            <a:r>
-              <a:rPr lang="en-US" sz="1200" dirty="0">
-                <a:solidFill>
-                  <a:srgbClr val="1A1A1A"/>
-                </a:solidFill>
-                <a:latin typeface="Georgia" pitchFamily="34" charset="0"/>
-                <a:ea typeface="Georgia" pitchFamily="34" charset="-122"/>
-                <a:cs typeface="Georgia" pitchFamily="34" charset="-120"/>
-              </a:rPr>
-              <a:t> From ritual hymn (Saṃhitā) to ethical-philosophical reflection (Upaniṣad).</a:t>
-            </a:r>
-            <a:endParaRPr lang="en-US" sz="1200" dirty="0"/>
-          </a:p>
-        </p:txBody>
-      </p:sp>
-      <p:sp>
-        <p:nvSpPr>
-          <p:cNvPr id="9" name="Text 7"/>
-          <p:cNvSpPr/>
-          <p:nvPr/>
-        </p:nvSpPr>
-        <p:spPr>
-          <a:xfrm>
-            <a:off x="406301" y="2719239"/>
-            <a:ext cx="8498026" cy="213271"/>
-          </a:xfrm>
-          <a:prstGeom prst="rect">
-            <a:avLst/>
-          </a:prstGeom>
-          <a:noFill/>
-          <a:ln/>
-        </p:spPr>
-        <p:txBody>
-          <a:bodyPr wrap="square" lIns="0" tIns="0" rIns="0" bIns="0" rtlCol="0" anchor="t"/>
-          <a:lstStyle/>
-          <a:p>
-            <a:pPr algn="l" indent="0" marL="0">
-              <a:lnSpc>
-                <a:spcPts val="1680"/>
-              </a:lnSpc>
-              <a:spcBef>
-                <a:spcPts val="300"/>
-              </a:spcBef>
-              <a:spcAft>
-                <a:spcPts val="300"/>
-              </a:spcAft>
-              <a:buNone/>
-            </a:pPr>
-            <a:r>
-              <a:rPr lang="en-US" sz="1200" dirty="0">
-                <a:solidFill>
-                  <a:srgbClr val="1A1A1A"/>
-                </a:solidFill>
-                <a:latin typeface="Georgia" pitchFamily="34" charset="0"/>
-                <a:ea typeface="Georgia" pitchFamily="34" charset="-122"/>
-                <a:cs typeface="Georgia" pitchFamily="34" charset="-120"/>
-              </a:rPr>
-              <a:t>– The intellectual contribution at this layer: abstract metaphysical inquiry; the seed of Vedānta philosophy.</a:t>
-            </a:r>
-            <a:endParaRPr lang="en-US" sz="1200" dirty="0"/>
-          </a:p>
-        </p:txBody>
-      </p:sp>
-      <p:sp>
-        <p:nvSpPr>
-          <p:cNvPr id="10" name="Text 8"/>
           <p:cNvSpPr/>
           <p:nvPr/>
         </p:nvSpPr>
@@ -4489,7 +4678,7 @@
                 <a:ea typeface="Times New Roman" pitchFamily="34" charset="-122"/>
                 <a:cs typeface="Times New Roman" pitchFamily="34" charset="-120"/>
               </a:rPr>
-              <a:t>Discussion (5 min)</a:t>
+              <a:t>Reading 1: Ṛg Veda 1.1 (15 min) (cont.)</a:t>
             </a:r>
             <a:endParaRPr lang="en-US" sz="1800" dirty="0"/>
           </a:p>
@@ -4503,8 +4692,8 @@
         </p:nvSpPr>
         <p:spPr>
           <a:xfrm>
-            <a:off x="406301" y="870942"/>
-            <a:ext cx="8498026" cy="426541"/>
+            <a:off x="634901" y="883593"/>
+            <a:ext cx="8102798" cy="975122"/>
           </a:xfrm>
           <a:prstGeom prst="rect">
             <a:avLst/>
@@ -4516,17 +4705,15 @@
           <a:bodyPr wrap="square" lIns="0" tIns="0" rIns="0" bIns="0" rtlCol="0" anchor="t"/>
           <a:lstStyle/>
           <a:p>
-            <a:pPr algn="l" indent="0" marL="0">
-              <a:lnSpc>
-                <a:spcPts val="1680"/>
-              </a:lnSpc>
-              <a:spcBef>
-                <a:spcPts val="300"/>
-              </a:spcBef>
-              <a:spcAft>
-                <a:spcPts val="300"/>
-              </a:spcAft>
-              <a:buNone/>
+            <a:pPr algn="l" marL="342900" indent="-342900">
+              <a:lnSpc>
+                <a:spcPts val="1620"/>
+              </a:lnSpc>
+              <a:spcAft>
+                <a:spcPts val="300"/>
+              </a:spcAft>
+              <a:buSzPct val="100000"/>
+              <a:buChar char="•"/>
             </a:pPr>
             <a:r>
               <a:rPr lang="en-US" sz="1200" dirty="0">
@@ -4537,7 +4724,235 @@
                 <a:ea typeface="Georgia" pitchFamily="34" charset="-122"/>
                 <a:cs typeface="Georgia" pitchFamily="34" charset="-120"/>
               </a:rPr>
-              <a:t>– Compare: the tone of the Agni hymn versus the Īśa Upaniṣad. What changed? – The Vedic corpus contains BOTH — ritual and philosophy, hymn and abstract reflection. "Vedic" is a span, not a single voice.</a:t>
+              <a:t>Word-by-word: </a:t>
+            </a:r>
+            <a:pPr algn="l" indent="0" marL="0">
+              <a:lnSpc>
+                <a:spcPts val="1620"/>
+              </a:lnSpc>
+              <a:spcAft>
+                <a:spcPts val="300"/>
+              </a:spcAft>
+              <a:buNone/>
+            </a:pPr>
+            <a:r>
+              <a:rPr lang="en-US" sz="1200" i="1" dirty="0">
+                <a:solidFill>
+                  <a:srgbClr val="1A1A1A"/>
+                </a:solidFill>
+                <a:latin typeface="Georgia" pitchFamily="34" charset="0"/>
+                <a:ea typeface="Georgia" pitchFamily="34" charset="-122"/>
+                <a:cs typeface="Georgia" pitchFamily="34" charset="-120"/>
+              </a:rPr>
+              <a:t>agnim</a:t>
+            </a:r>
+            <a:pPr algn="l" indent="0" marL="0">
+              <a:lnSpc>
+                <a:spcPts val="1620"/>
+              </a:lnSpc>
+              <a:spcAft>
+                <a:spcPts val="300"/>
+              </a:spcAft>
+              <a:buNone/>
+            </a:pPr>
+            <a:r>
+              <a:rPr lang="en-US" sz="1200" dirty="0">
+                <a:solidFill>
+                  <a:srgbClr val="1A1A1A"/>
+                </a:solidFill>
+                <a:latin typeface="Georgia" pitchFamily="34" charset="0"/>
+                <a:ea typeface="Georgia" pitchFamily="34" charset="-122"/>
+                <a:cs typeface="Georgia" pitchFamily="34" charset="-120"/>
+              </a:rPr>
+              <a:t> (Agni, acc.) + </a:t>
+            </a:r>
+            <a:pPr algn="l" indent="0" marL="0">
+              <a:lnSpc>
+                <a:spcPts val="1620"/>
+              </a:lnSpc>
+              <a:spcAft>
+                <a:spcPts val="300"/>
+              </a:spcAft>
+              <a:buNone/>
+            </a:pPr>
+            <a:r>
+              <a:rPr lang="en-US" sz="1200" i="1" dirty="0">
+                <a:solidFill>
+                  <a:srgbClr val="1A1A1A"/>
+                </a:solidFill>
+                <a:latin typeface="Georgia" pitchFamily="34" charset="0"/>
+                <a:ea typeface="Georgia" pitchFamily="34" charset="-122"/>
+                <a:cs typeface="Georgia" pitchFamily="34" charset="-120"/>
+              </a:rPr>
+              <a:t>īḷe</a:t>
+            </a:r>
+            <a:pPr algn="l" indent="0" marL="0">
+              <a:lnSpc>
+                <a:spcPts val="1620"/>
+              </a:lnSpc>
+              <a:spcAft>
+                <a:spcPts val="300"/>
+              </a:spcAft>
+              <a:buNone/>
+            </a:pPr>
+            <a:r>
+              <a:rPr lang="en-US" sz="1200" dirty="0">
+                <a:solidFill>
+                  <a:srgbClr val="1A1A1A"/>
+                </a:solidFill>
+                <a:latin typeface="Georgia" pitchFamily="34" charset="0"/>
+                <a:ea typeface="Georgia" pitchFamily="34" charset="-122"/>
+                <a:cs typeface="Georgia" pitchFamily="34" charset="-120"/>
+              </a:rPr>
+              <a:t> (I praise) + </a:t>
+            </a:r>
+            <a:pPr algn="l" indent="0" marL="0">
+              <a:lnSpc>
+                <a:spcPts val="1620"/>
+              </a:lnSpc>
+              <a:spcAft>
+                <a:spcPts val="300"/>
+              </a:spcAft>
+              <a:buNone/>
+            </a:pPr>
+            <a:r>
+              <a:rPr lang="en-US" sz="1200" i="1" dirty="0">
+                <a:solidFill>
+                  <a:srgbClr val="1A1A1A"/>
+                </a:solidFill>
+                <a:latin typeface="Georgia" pitchFamily="34" charset="0"/>
+                <a:ea typeface="Georgia" pitchFamily="34" charset="-122"/>
+                <a:cs typeface="Georgia" pitchFamily="34" charset="-120"/>
+              </a:rPr>
+              <a:t>purohitam</a:t>
+            </a:r>
+            <a:pPr algn="l" indent="0" marL="0">
+              <a:lnSpc>
+                <a:spcPts val="1620"/>
+              </a:lnSpc>
+              <a:spcAft>
+                <a:spcPts val="300"/>
+              </a:spcAft>
+              <a:buNone/>
+            </a:pPr>
+            <a:r>
+              <a:rPr lang="en-US" sz="1200" dirty="0">
+                <a:solidFill>
+                  <a:srgbClr val="1A1A1A"/>
+                </a:solidFill>
+                <a:latin typeface="Georgia" pitchFamily="34" charset="0"/>
+                <a:ea typeface="Georgia" pitchFamily="34" charset="-122"/>
+                <a:cs typeface="Georgia" pitchFamily="34" charset="-120"/>
+              </a:rPr>
+              <a:t> (household priest) + </a:t>
+            </a:r>
+            <a:pPr algn="l" indent="0" marL="0">
+              <a:lnSpc>
+                <a:spcPts val="1620"/>
+              </a:lnSpc>
+              <a:spcAft>
+                <a:spcPts val="300"/>
+              </a:spcAft>
+              <a:buNone/>
+            </a:pPr>
+            <a:r>
+              <a:rPr lang="en-US" sz="1200" i="1" dirty="0">
+                <a:solidFill>
+                  <a:srgbClr val="1A1A1A"/>
+                </a:solidFill>
+                <a:latin typeface="Georgia" pitchFamily="34" charset="0"/>
+                <a:ea typeface="Georgia" pitchFamily="34" charset="-122"/>
+                <a:cs typeface="Georgia" pitchFamily="34" charset="-120"/>
+              </a:rPr>
+              <a:t>yajñasya</a:t>
+            </a:r>
+            <a:pPr algn="l" indent="0" marL="0">
+              <a:lnSpc>
+                <a:spcPts val="1620"/>
+              </a:lnSpc>
+              <a:spcAft>
+                <a:spcPts val="300"/>
+              </a:spcAft>
+              <a:buNone/>
+            </a:pPr>
+            <a:r>
+              <a:rPr lang="en-US" sz="1200" dirty="0">
+                <a:solidFill>
+                  <a:srgbClr val="1A1A1A"/>
+                </a:solidFill>
+                <a:latin typeface="Georgia" pitchFamily="34" charset="0"/>
+                <a:ea typeface="Georgia" pitchFamily="34" charset="-122"/>
+                <a:cs typeface="Georgia" pitchFamily="34" charset="-120"/>
+              </a:rPr>
+              <a:t> (of the sacrifice, gen.) ...</a:t>
+            </a:r>
+            <a:endParaRPr lang="en-US" sz="1200" dirty="0"/>
+          </a:p>
+          <a:p>
+            <a:pPr algn="l" marL="342900" indent="-342900">
+              <a:lnSpc>
+                <a:spcPts val="1620"/>
+              </a:lnSpc>
+              <a:spcAft>
+                <a:spcPts val="300"/>
+              </a:spcAft>
+              <a:buSzPct val="100000"/>
+              <a:buChar char="•"/>
+            </a:pPr>
+            <a:r>
+              <a:rPr lang="en-US" sz="1200" b="1" dirty="0">
+                <a:solidFill>
+                  <a:srgbClr val="1A1A1A"/>
+                </a:solidFill>
+                <a:latin typeface="Georgia" pitchFamily="34" charset="0"/>
+                <a:ea typeface="Georgia" pitchFamily="34" charset="-122"/>
+                <a:cs typeface="Georgia" pitchFamily="34" charset="-120"/>
+              </a:rPr>
+              <a:t>Note:</a:t>
+            </a:r>
+            <a:pPr algn="l" indent="0" marL="0">
+              <a:lnSpc>
+                <a:spcPts val="1620"/>
+              </a:lnSpc>
+              <a:spcAft>
+                <a:spcPts val="300"/>
+              </a:spcAft>
+              <a:buNone/>
+            </a:pPr>
+            <a:r>
+              <a:rPr lang="en-US" sz="1200" dirty="0">
+                <a:solidFill>
+                  <a:srgbClr val="1A1A1A"/>
+                </a:solidFill>
+                <a:latin typeface="Georgia" pitchFamily="34" charset="0"/>
+                <a:ea typeface="Georgia" pitchFamily="34" charset="-122"/>
+                <a:cs typeface="Georgia" pitchFamily="34" charset="-120"/>
+              </a:rPr>
+              <a:t> this is a hymn of praise. The earliest layer of the Veda is ritual-centric.</a:t>
+            </a:r>
+            <a:endParaRPr lang="en-US" sz="1200" dirty="0"/>
+          </a:p>
+          <a:p>
+            <a:pPr algn="l" marL="342900" indent="-342900">
+              <a:lnSpc>
+                <a:spcPts val="1620"/>
+              </a:lnSpc>
+              <a:spcAft>
+                <a:spcPts val="300"/>
+              </a:spcAft>
+              <a:buSzPct val="100000"/>
+              <a:buChar char="•"/>
+            </a:pPr>
+            <a:r>
+              <a:rPr lang="en-US" sz="1200" dirty="0">
+                <a:solidFill>
+                  <a:srgbClr val="1A1A1A"/>
+                </a:solidFill>
+                <a:latin typeface="Georgia" pitchFamily="34" charset="0"/>
+                <a:ea typeface="Georgia" pitchFamily="34" charset="-122"/>
+                <a:cs typeface="Georgia" pitchFamily="34" charset="-120"/>
+              </a:rPr>
+              <a:t>The intellectual contribution at this layer: precise oral transmission (across ~3000 years) generated the linguistic discipline that became Pāṇini.</a:t>
             </a:r>
             <a:endParaRPr lang="en-US" sz="1200" dirty="0"/>
           </a:p>
@@ -4695,7 +5110,7 @@
                 <a:ea typeface="Times New Roman" pitchFamily="34" charset="-122"/>
                 <a:cs typeface="Times New Roman" pitchFamily="34" charset="-120"/>
               </a:rPr>
-              <a:t>Wrap-up (5 min)</a:t>
+              <a:t>Reading 2: Īśa Upaniṣad opening (15 min)</a:t>
             </a:r>
             <a:endParaRPr lang="en-US" sz="1800" dirty="0"/>
           </a:p>
@@ -4709,8 +5124,61 @@
         </p:nvSpPr>
         <p:spPr>
           <a:xfrm>
-            <a:off x="406301" y="870942"/>
-            <a:ext cx="8498026" cy="213271"/>
+            <a:off x="406301" y="883593"/>
+            <a:ext cx="8331398" cy="1073944"/>
+          </a:xfrm>
+          <a:prstGeom prst="rect">
+            <a:avLst/>
+          </a:prstGeom>
+          <a:solidFill>
+            <a:srgbClr val="FFFFFF"/>
+          </a:solidFill>
+          <a:ln/>
+        </p:spPr>
+        <p:txBody>
+          <a:bodyPr wrap="square" rtlCol="0" anchor="ctr"/>
+          <a:lstStyle/>
+          <a:p>
+            <a:pPr indent="0" marL="0">
+              <a:buNone/>
+            </a:pPr>
+            <a:endParaRPr lang="en-US" dirty="0"/>
+          </a:p>
+        </p:txBody>
+      </p:sp>
+      <p:sp>
+        <p:nvSpPr>
+          <p:cNvPr id="5" name="Shape 3"/>
+          <p:cNvSpPr/>
+          <p:nvPr/>
+        </p:nvSpPr>
+        <p:spPr>
+          <a:xfrm>
+            <a:off x="434876" y="883593"/>
+            <a:ext cx="0" cy="1073944"/>
+          </a:xfrm>
+          <a:prstGeom prst="line">
+            <a:avLst/>
+          </a:prstGeom>
+          <a:noFill/>
+          <a:ln w="57150">
+            <a:solidFill>
+              <a:srgbClr val="997929"/>
+            </a:solidFill>
+            <a:prstDash val="solid"/>
+          </a:ln>
+        </p:spPr>
+      </p:sp>
+      <p:sp>
+        <p:nvSpPr>
+          <p:cNvPr id="6" name="Text 4"/>
+          <p:cNvSpPr/>
+          <p:nvPr/>
+        </p:nvSpPr>
+        <p:spPr>
+          <a:xfrm>
+            <a:off x="692051" y="1074093"/>
+            <a:ext cx="7973389" cy="692944"/>
           </a:xfrm>
           <a:prstGeom prst="rect">
             <a:avLst/>
@@ -4724,7 +5192,7 @@
           <a:p>
             <a:pPr algn="l" indent="0" marL="0">
               <a:lnSpc>
-                <a:spcPts val="1680"/>
+                <a:spcPts val="1820"/>
               </a:lnSpc>
               <a:spcBef>
                 <a:spcPts val="300"/>
@@ -4735,19 +5203,19 @@
               <a:buNone/>
             </a:pPr>
             <a:r>
-              <a:rPr lang="en-US" sz="1200" dirty="0">
-                <a:solidFill>
-                  <a:srgbClr val="1A1A1A"/>
-                </a:solidFill>
-                <a:latin typeface="Georgia" pitchFamily="34" charset="0"/>
-                <a:ea typeface="Georgia" pitchFamily="34" charset="-122"/>
-                <a:cs typeface="Georgia" pitchFamily="34" charset="-120"/>
-              </a:rPr>
-              <a:t>– Preview Day 3: </a:t>
+              <a:rPr lang="en-US" sz="1300" i="1" dirty="0">
+                <a:solidFill>
+                  <a:srgbClr val="1A1A1A"/>
+                </a:solidFill>
+                <a:latin typeface="Times New Roman" pitchFamily="34" charset="0"/>
+                <a:ea typeface="Times New Roman" pitchFamily="34" charset="-122"/>
+                <a:cs typeface="Times New Roman" pitchFamily="34" charset="-120"/>
+              </a:rPr>
+              <a:t>īśā vāsyam idaṁ sarvaṁ yat kiñca jagatyāṁ jagat</a:t>
             </a:r>
             <a:pPr algn="l" indent="0" marL="0">
               <a:lnSpc>
-                <a:spcPts val="1680"/>
+                <a:spcPts val="1820"/>
               </a:lnSpc>
               <a:spcBef>
                 <a:spcPts val="300"/>
@@ -4758,23 +5226,69 @@
               <a:buNone/>
             </a:pPr>
             <a:r>
-              <a:rPr lang="en-US" sz="1200" i="1" dirty="0">
-                <a:solidFill>
-                  <a:srgbClr val="1A1A1A"/>
-                </a:solidFill>
-                <a:latin typeface="Georgia" pitchFamily="34" charset="0"/>
-                <a:ea typeface="Georgia" pitchFamily="34" charset="-122"/>
-                <a:cs typeface="Georgia" pitchFamily="34" charset="-120"/>
-              </a:rPr>
-              <a:t>"Tomorrow — the six darśanas, the philosophical schools."</a:t>
-            </a:r>
-            <a:endParaRPr lang="en-US" sz="1200" dirty="0"/>
-          </a:p>
-        </p:txBody>
-      </p:sp>
-      <p:sp>
-        <p:nvSpPr>
-          <p:cNvPr id="5" name="Text 3"/>
+              <a:rPr lang="en-US" sz="1300" dirty="0">
+                <a:solidFill>
+                  <a:srgbClr val="1A1A1A"/>
+                </a:solidFill>
+                <a:latin typeface="Times New Roman" pitchFamily="34" charset="0"/>
+                <a:ea typeface="Times New Roman" pitchFamily="34" charset="-122"/>
+                <a:cs typeface="Times New Roman" pitchFamily="34" charset="-120"/>
+              </a:rPr>
+              <a:t> </a:t>
+            </a:r>
+            <a:pPr algn="l" indent="0" marL="0">
+              <a:lnSpc>
+                <a:spcPts val="1820"/>
+              </a:lnSpc>
+              <a:spcBef>
+                <a:spcPts val="300"/>
+              </a:spcBef>
+              <a:spcAft>
+                <a:spcPts val="300"/>
+              </a:spcAft>
+              <a:buNone/>
+            </a:pPr>
+            <a:r>
+              <a:rPr lang="en-US" sz="1300" i="1" dirty="0">
+                <a:solidFill>
+                  <a:srgbClr val="1A1A1A"/>
+                </a:solidFill>
+                <a:latin typeface="Times New Roman" pitchFamily="34" charset="0"/>
+                <a:ea typeface="Times New Roman" pitchFamily="34" charset="-122"/>
+                <a:cs typeface="Times New Roman" pitchFamily="34" charset="-120"/>
+              </a:rPr>
+              <a:t>tena tyaktena bhuñjīthā mā gṛdhaḥ kasya svid dhanam</a:t>
+            </a:r>
+            <a:pPr algn="l" indent="0" marL="0">
+              <a:lnSpc>
+                <a:spcPts val="1820"/>
+              </a:lnSpc>
+              <a:spcBef>
+                <a:spcPts val="300"/>
+              </a:spcBef>
+              <a:spcAft>
+                <a:spcPts val="300"/>
+              </a:spcAft>
+              <a:buNone/>
+            </a:pPr>
+            <a:r>
+              <a:rPr lang="en-US" sz="1300" dirty="0">
+                <a:solidFill>
+                  <a:srgbClr val="1A1A1A"/>
+                </a:solidFill>
+                <a:latin typeface="Times New Roman" pitchFamily="34" charset="0"/>
+                <a:ea typeface="Times New Roman" pitchFamily="34" charset="-122"/>
+                <a:cs typeface="Times New Roman" pitchFamily="34" charset="-120"/>
+              </a:rPr>
+              <a:t> "Whatever moves in this moving world is enveloped by the Lord. Enjoy what has been abandoned. Do not covet anyone's wealth."</a:t>
+            </a:r>
+            <a:endParaRPr lang="en-US" sz="1300" dirty="0"/>
+          </a:p>
+        </p:txBody>
+      </p:sp>
+      <p:sp>
+        <p:nvSpPr>
+          <p:cNvPr id="7" name="Text 5"/>
           <p:cNvSpPr/>
           <p:nvPr/>
         </p:nvSpPr>
@@ -4924,7 +5438,7 @@
                 <a:ea typeface="Times New Roman" pitchFamily="34" charset="-122"/>
                 <a:cs typeface="Times New Roman" pitchFamily="34" charset="-120"/>
               </a:rPr>
-              <a:t>Differentiation</a:t>
+              <a:t>Reading 2: Īśa Upaniṣad opening (15 min) (cont.)</a:t>
             </a:r>
             <a:endParaRPr lang="en-US" sz="1800" dirty="0"/>
           </a:p>
@@ -4939,7 +5453,7 @@
         <p:spPr>
           <a:xfrm>
             <a:off x="634901" y="883593"/>
-            <a:ext cx="8102798" cy="525661"/>
+            <a:ext cx="8102798" cy="769441"/>
           </a:xfrm>
           <a:prstGeom prst="rect">
             <a:avLst/>
@@ -4962,7 +5476,7 @@
               <a:buChar char="•"/>
             </a:pPr>
             <a:r>
-              <a:rPr lang="en-US" sz="1200" b="1" dirty="0">
+              <a:rPr lang="en-US" sz="1200" dirty="0">
                 <a:solidFill>
                   <a:srgbClr val="1A1A1A"/>
                 </a:solidFill>
@@ -4970,7 +5484,7 @@
                 <a:ea typeface="Georgia" pitchFamily="34" charset="-122"/>
                 <a:cs typeface="Georgia" pitchFamily="34" charset="-120"/>
               </a:rPr>
-              <a:t>Tier up:</a:t>
+              <a:t>Word-by-word: </a:t>
             </a:r>
             <a:pPr algn="l" indent="0" marL="0">
               <a:lnSpc>
@@ -4982,7 +5496,7 @@
               <a:buNone/>
             </a:pPr>
             <a:r>
-              <a:rPr lang="en-US" sz="1200" dirty="0">
+              <a:rPr lang="en-US" sz="1200" i="1" dirty="0">
                 <a:solidFill>
                   <a:srgbClr val="1A1A1A"/>
                 </a:solidFill>
@@ -4990,23 +5504,19 @@
                 <a:ea typeface="Georgia" pitchFamily="34" charset="-122"/>
                 <a:cs typeface="Georgia" pitchFamily="34" charset="-120"/>
               </a:rPr>
-              <a:t> Read 5 more verses of Īśa Upaniṣad. Identify one verse that surprised you.</a:t>
-            </a:r>
-            <a:endParaRPr lang="en-US" sz="1200" dirty="0"/>
-          </a:p>
-          <a:p>
-            <a:pPr algn="l" marL="342900" indent="-342900">
+              <a:t>īśā</a:t>
+            </a:r>
+            <a:pPr algn="l" indent="0" marL="0">
               <a:lnSpc>
                 <a:spcPts val="1620"/>
               </a:lnSpc>
               <a:spcAft>
                 <a:spcPts val="300"/>
               </a:spcAft>
-              <a:buSzPct val="100000"/>
-              <a:buChar char="•"/>
-            </a:pPr>
-            <a:r>
-              <a:rPr lang="en-US" sz="1200" b="1" dirty="0">
+              <a:buNone/>
+            </a:pPr>
+            <a:r>
+              <a:rPr lang="en-US" sz="1200" dirty="0">
                 <a:solidFill>
                   <a:srgbClr val="1A1A1A"/>
                 </a:solidFill>
@@ -5014,7 +5524,7 @@
                 <a:ea typeface="Georgia" pitchFamily="34" charset="-122"/>
                 <a:cs typeface="Georgia" pitchFamily="34" charset="-120"/>
               </a:rPr>
-              <a:t>Tier down:</a:t>
+              <a:t> (by the Lord, inst.) + </a:t>
             </a:r>
             <a:pPr algn="l" indent="0" marL="0">
               <a:lnSpc>
@@ -5026,7 +5536,7 @@
               <a:buNone/>
             </a:pPr>
             <a:r>
-              <a:rPr lang="en-US" sz="1200" dirty="0">
+              <a:rPr lang="en-US" sz="1200" i="1" dirty="0">
                 <a:solidFill>
                   <a:srgbClr val="1A1A1A"/>
                 </a:solidFill>
@@ -5034,7 +5544,135 @@
                 <a:ea typeface="Georgia" pitchFamily="34" charset="-122"/>
                 <a:cs typeface="Georgia" pitchFamily="34" charset="-120"/>
               </a:rPr>
-              <a:t> Focus on the contrast between the two readings, not detailed Sanskrit.</a:t>
+              <a:t>vāsyam</a:t>
+            </a:r>
+            <a:pPr algn="l" indent="0" marL="0">
+              <a:lnSpc>
+                <a:spcPts val="1620"/>
+              </a:lnSpc>
+              <a:spcAft>
+                <a:spcPts val="300"/>
+              </a:spcAft>
+              <a:buNone/>
+            </a:pPr>
+            <a:r>
+              <a:rPr lang="en-US" sz="1200" dirty="0">
+                <a:solidFill>
+                  <a:srgbClr val="1A1A1A"/>
+                </a:solidFill>
+                <a:latin typeface="Georgia" pitchFamily="34" charset="0"/>
+                <a:ea typeface="Georgia" pitchFamily="34" charset="-122"/>
+                <a:cs typeface="Georgia" pitchFamily="34" charset="-120"/>
+              </a:rPr>
+              <a:t> (to be enveloped) + </a:t>
+            </a:r>
+            <a:pPr algn="l" indent="0" marL="0">
+              <a:lnSpc>
+                <a:spcPts val="1620"/>
+              </a:lnSpc>
+              <a:spcAft>
+                <a:spcPts val="300"/>
+              </a:spcAft>
+              <a:buNone/>
+            </a:pPr>
+            <a:r>
+              <a:rPr lang="en-US" sz="1200" i="1" dirty="0">
+                <a:solidFill>
+                  <a:srgbClr val="1A1A1A"/>
+                </a:solidFill>
+                <a:latin typeface="Georgia" pitchFamily="34" charset="0"/>
+                <a:ea typeface="Georgia" pitchFamily="34" charset="-122"/>
+                <a:cs typeface="Georgia" pitchFamily="34" charset="-120"/>
+              </a:rPr>
+              <a:t>idam sarvam</a:t>
+            </a:r>
+            <a:pPr algn="l" indent="0" marL="0">
+              <a:lnSpc>
+                <a:spcPts val="1620"/>
+              </a:lnSpc>
+              <a:spcAft>
+                <a:spcPts val="300"/>
+              </a:spcAft>
+              <a:buNone/>
+            </a:pPr>
+            <a:r>
+              <a:rPr lang="en-US" sz="1200" dirty="0">
+                <a:solidFill>
+                  <a:srgbClr val="1A1A1A"/>
+                </a:solidFill>
+                <a:latin typeface="Georgia" pitchFamily="34" charset="0"/>
+                <a:ea typeface="Georgia" pitchFamily="34" charset="-122"/>
+                <a:cs typeface="Georgia" pitchFamily="34" charset="-120"/>
+              </a:rPr>
+              <a:t> (all this) ...</a:t>
+            </a:r>
+            <a:endParaRPr lang="en-US" sz="1200" dirty="0"/>
+          </a:p>
+          <a:p>
+            <a:pPr algn="l" marL="342900" indent="-342900">
+              <a:lnSpc>
+                <a:spcPts val="1620"/>
+              </a:lnSpc>
+              <a:spcAft>
+                <a:spcPts val="300"/>
+              </a:spcAft>
+              <a:buSzPct val="100000"/>
+              <a:buChar char="•"/>
+            </a:pPr>
+            <a:r>
+              <a:rPr lang="en-US" sz="1200" b="1" dirty="0">
+                <a:solidFill>
+                  <a:srgbClr val="1A1A1A"/>
+                </a:solidFill>
+                <a:latin typeface="Georgia" pitchFamily="34" charset="0"/>
+                <a:ea typeface="Georgia" pitchFamily="34" charset="-122"/>
+                <a:cs typeface="Georgia" pitchFamily="34" charset="-120"/>
+              </a:rPr>
+              <a:t>Note the move.</a:t>
+            </a:r>
+            <a:pPr algn="l" indent="0" marL="0">
+              <a:lnSpc>
+                <a:spcPts val="1620"/>
+              </a:lnSpc>
+              <a:spcAft>
+                <a:spcPts val="300"/>
+              </a:spcAft>
+              <a:buNone/>
+            </a:pPr>
+            <a:r>
+              <a:rPr lang="en-US" sz="1200" dirty="0">
+                <a:solidFill>
+                  <a:srgbClr val="1A1A1A"/>
+                </a:solidFill>
+                <a:latin typeface="Georgia" pitchFamily="34" charset="0"/>
+                <a:ea typeface="Georgia" pitchFamily="34" charset="-122"/>
+                <a:cs typeface="Georgia" pitchFamily="34" charset="-120"/>
+              </a:rPr>
+              <a:t> From ritual hymn (Saṃhitā) to ethical-philosophical reflection (Upaniṣad).</a:t>
+            </a:r>
+            <a:endParaRPr lang="en-US" sz="1200" dirty="0"/>
+          </a:p>
+          <a:p>
+            <a:pPr algn="l" marL="342900" indent="-342900">
+              <a:lnSpc>
+                <a:spcPts val="1620"/>
+              </a:lnSpc>
+              <a:spcAft>
+                <a:spcPts val="300"/>
+              </a:spcAft>
+              <a:buSzPct val="100000"/>
+              <a:buChar char="•"/>
+            </a:pPr>
+            <a:r>
+              <a:rPr lang="en-US" sz="1200" dirty="0">
+                <a:solidFill>
+                  <a:srgbClr val="1A1A1A"/>
+                </a:solidFill>
+                <a:latin typeface="Georgia" pitchFamily="34" charset="0"/>
+                <a:ea typeface="Georgia" pitchFamily="34" charset="-122"/>
+                <a:cs typeface="Georgia" pitchFamily="34" charset="-120"/>
+              </a:rPr>
+              <a:t>The intellectual contribution at this layer: abstract metaphysical inquiry; the seed of Vedānta philosophy.</a:t>
             </a:r>
             <a:endParaRPr lang="en-US" sz="1200" dirty="0"/>
           </a:p>
